--- a/web/downloads/shared/w3/W3.pptx
+++ b/web/downloads/shared/w3/W3.pptx
@@ -19,6 +19,9 @@
     <p:sldId id="267" r:id="rId18"/>
     <p:sldId id="268" r:id="rId19"/>
     <p:sldId id="269" r:id="rId20"/>
+    <p:sldId id="270" r:id="rId21"/>
+    <p:sldId id="271" r:id="rId22"/>
+    <p:sldId id="272" r:id="rId23"/>
   </p:sldIdLst>
   <p:sldSz cx="12191695" cy="6858000" type="screen4x3"/>
   <p:notesSz cx="6858000" cy="9144000"/>
@@ -3254,7 +3257,7 @@
                 </a:solidFill>
                 <a:latin typeface="Pretendard SemiBold"/>
               </a:rPr>
-              <a:t>두 신경망의 경쟁으로 "그럴듯한 평균" 대신 "진짜 같은 구조"를 만든다</a:t>
+              <a:t>두 신경망을 경쟁시켜 흐림 없는 복원을 — 원리·수식부터 투과율 검증까지</a:t>
             </a:r>
           </a:p>
         </p:txBody>
@@ -3350,7 +3353,7 @@
                 </a:solidFill>
                 <a:latin typeface="Pretendard Black"/>
               </a:rPr>
-              <a:t>불안정한 줄다리기 길들이기</a:t>
+              <a:t>§3 우리 문제에 맞추는 세 장치</a:t>
             </a:r>
           </a:p>
         </p:txBody>
@@ -3471,7 +3474,7 @@
                 </a:solidFill>
                 <a:latin typeface="Pretendard Medium"/>
               </a:rPr>
-              <a:t>10 / 14</a:t>
+              <a:t>10 / 17</a:t>
             </a:r>
           </a:p>
         </p:txBody>
@@ -3484,8 +3487,115 @@
         </p:nvSpPr>
         <p:spPr>
           <a:xfrm>
-            <a:off x="548640" y="1371600"/>
-            <a:ext cx="5486400" cy="457200"/>
+            <a:off x="731520" y="1645920"/>
+            <a:ext cx="10972800" cy="2560320"/>
+          </a:xfrm>
+          <a:prstGeom prst="rect">
+            <a:avLst/>
+          </a:prstGeom>
+          <a:noFill/>
+        </p:spPr>
+        <p:txBody>
+          <a:bodyPr wrap="square">
+            <a:spAutoFit/>
+          </a:bodyPr>
+          <a:lstStyle/>
+          <a:p>
+            <a:pPr>
+              <a:lnSpc>
+                <a:spcPct val="130000"/>
+              </a:lnSpc>
+              <a:spcAft>
+                <a:spcPts val="600"/>
+              </a:spcAft>
+            </a:pPr>
+            <a:r>
+              <a:rPr sz="1800" b="0">
+                <a:solidFill>
+                  <a:srgbClr val="EA851B"/>
+                </a:solidFill>
+                <a:latin typeface="Pretendard ExtraBold"/>
+              </a:rPr>
+              <a:t>•  </a:t>
+            </a:r>
+            <a:r>
+              <a:rPr sz="1800" b="0">
+                <a:solidFill>
+                  <a:srgbClr val="181818"/>
+                </a:solidFill>
+                <a:latin typeface="Pretendard SemiBold"/>
+              </a:rPr>
+              <a:t>① 조건부 — 판별자도 이웃(문제지)을 본다: "이웃 사이에 올 법한 단면인가"까지 심사</a:t>
+            </a:r>
+          </a:p>
+          <a:p>
+            <a:pPr>
+              <a:lnSpc>
+                <a:spcPct val="130000"/>
+              </a:lnSpc>
+              <a:spcAft>
+                <a:spcPts val="600"/>
+              </a:spcAft>
+            </a:pPr>
+            <a:r>
+              <a:rPr sz="1800" b="0">
+                <a:solidFill>
+                  <a:srgbClr val="EA851B"/>
+                </a:solidFill>
+                <a:latin typeface="Pretendard ExtraBold"/>
+              </a:rPr>
+              <a:t>•  </a:t>
+            </a:r>
+            <a:r>
+              <a:rPr sz="1800" b="0">
+                <a:solidFill>
+                  <a:srgbClr val="181818"/>
+                </a:solidFill>
+                <a:latin typeface="Pretendard SemiBold"/>
+              </a:rPr>
+              <a:t>② PatchGAN — 조각(patch)마다 점수: 국소 경계·텍스처에 민감 (16×16 점수 map)</a:t>
+            </a:r>
+          </a:p>
+          <a:p>
+            <a:pPr>
+              <a:lnSpc>
+                <a:spcPct val="130000"/>
+              </a:lnSpc>
+              <a:spcAft>
+                <a:spcPts val="600"/>
+              </a:spcAft>
+            </a:pPr>
+            <a:r>
+              <a:rPr sz="1800" b="0">
+                <a:solidFill>
+                  <a:srgbClr val="EA851B"/>
+                </a:solidFill>
+                <a:latin typeface="Pretendard ExtraBold"/>
+              </a:rPr>
+              <a:t>•  </a:t>
+            </a:r>
+            <a:r>
+              <a:rPr sz="1800" b="0">
+                <a:solidFill>
+                  <a:srgbClr val="181818"/>
+                </a:solidFill>
+                <a:latin typeface="Pretendard SemiBold"/>
+              </a:rPr>
+              <a:t>③ spectral norm — 판별자 힘에 상한(Lipschitz ≤ 1): 독주를 구조적으로 차단</a:t>
+            </a:r>
+          </a:p>
+        </p:txBody>
+      </p:sp>
+      <p:sp>
+        <p:nvSpPr>
+          <p:cNvPr id="7" name="TextBox 6"/>
+          <p:cNvSpPr txBox="1"/>
+          <p:nvPr/>
+        </p:nvSpPr>
+        <p:spPr>
+          <a:xfrm>
+            <a:off x="731520" y="4846320"/>
+            <a:ext cx="10972800" cy="731520"/>
           </a:xfrm>
           <a:prstGeom prst="rect">
             <a:avLst/>
@@ -3504,294 +3614,13 @@
               </a:lnSpc>
             </a:pPr>
             <a:r>
-              <a:rPr sz="2200" b="0">
-                <a:solidFill>
-                  <a:srgbClr val="EA851B"/>
-                </a:solidFill>
-                <a:latin typeface="Pretendard Black"/>
-              </a:rPr>
-              <a:t>무너지는 신호</a:t>
-            </a:r>
-          </a:p>
-        </p:txBody>
-      </p:sp>
-      <p:sp>
-        <p:nvSpPr>
-          <p:cNvPr id="7" name="TextBox 6"/>
-          <p:cNvSpPr txBox="1"/>
-          <p:nvPr/>
-        </p:nvSpPr>
-        <p:spPr>
-          <a:xfrm>
-            <a:off x="548640" y="1920240"/>
-            <a:ext cx="5486400" cy="4572000"/>
-          </a:xfrm>
-          <a:prstGeom prst="rect">
-            <a:avLst/>
-          </a:prstGeom>
-          <a:noFill/>
-        </p:spPr>
-        <p:txBody>
-          <a:bodyPr wrap="square">
-            <a:spAutoFit/>
-          </a:bodyPr>
-          <a:lstStyle/>
-          <a:p>
-            <a:pPr>
-              <a:lnSpc>
-                <a:spcPct val="130000"/>
-              </a:lnSpc>
-              <a:spcAft>
-                <a:spcPts val="600"/>
-              </a:spcAft>
-            </a:pPr>
-            <a:r>
-              <a:rPr sz="1600" b="0">
-                <a:solidFill>
-                  <a:srgbClr val="EA851B"/>
-                </a:solidFill>
-                <a:latin typeface="Pretendard ExtraBold"/>
-              </a:rPr>
-              <a:t>•  </a:t>
-            </a:r>
-            <a:r>
-              <a:rPr sz="1600" b="0">
-                <a:solidFill>
-                  <a:srgbClr val="181818"/>
+              <a:rPr sz="1700" b="1">
+                <a:solidFill>
+                  <a:srgbClr val="1F3A5F"/>
                 </a:solidFill>
                 <a:latin typeface="Pretendard SemiBold"/>
               </a:rPr>
-              <a:t>D 독주 (D_loss→0, G 못 배움)</a:t>
-            </a:r>
-          </a:p>
-          <a:p>
-            <a:pPr>
-              <a:lnSpc>
-                <a:spcPct val="130000"/>
-              </a:lnSpc>
-              <a:spcAft>
-                <a:spcPts val="600"/>
-              </a:spcAft>
-            </a:pPr>
-            <a:r>
-              <a:rPr sz="1600" b="0">
-                <a:solidFill>
-                  <a:srgbClr val="EA851B"/>
-                </a:solidFill>
-                <a:latin typeface="Pretendard ExtraBold"/>
-              </a:rPr>
-              <a:t>•  </a:t>
-            </a:r>
-            <a:r>
-              <a:rPr sz="1600" b="0">
-                <a:solidFill>
-                  <a:srgbClr val="181818"/>
-                </a:solidFill>
-                <a:latin typeface="Pretendard SemiBold"/>
-              </a:rPr>
-              <a:t>진동/발산 (손실 흔들림·NaN)</a:t>
-            </a:r>
-          </a:p>
-          <a:p>
-            <a:pPr>
-              <a:lnSpc>
-                <a:spcPct val="130000"/>
-              </a:lnSpc>
-              <a:spcAft>
-                <a:spcPts val="600"/>
-              </a:spcAft>
-            </a:pPr>
-            <a:r>
-              <a:rPr sz="1600" b="0">
-                <a:solidFill>
-                  <a:srgbClr val="EA851B"/>
-                </a:solidFill>
-                <a:latin typeface="Pretendard ExtraBold"/>
-              </a:rPr>
-              <a:t>•  </a:t>
-            </a:r>
-            <a:r>
-              <a:rPr sz="1600" b="0">
-                <a:solidFill>
-                  <a:srgbClr val="181818"/>
-                </a:solidFill>
-                <a:latin typeface="Pretendard SemiBold"/>
-              </a:rPr>
-              <a:t>mode collapse (한 가지만 반복)</a:t>
-            </a:r>
-          </a:p>
-        </p:txBody>
-      </p:sp>
-      <p:sp>
-        <p:nvSpPr>
-          <p:cNvPr id="8" name="TextBox 7"/>
-          <p:cNvSpPr txBox="1"/>
-          <p:nvPr/>
-        </p:nvSpPr>
-        <p:spPr>
-          <a:xfrm>
-            <a:off x="6400800" y="1371600"/>
-            <a:ext cx="5486400" cy="457200"/>
-          </a:xfrm>
-          <a:prstGeom prst="rect">
-            <a:avLst/>
-          </a:prstGeom>
-          <a:noFill/>
-        </p:spPr>
-        <p:txBody>
-          <a:bodyPr wrap="square" lIns="45720" rIns="45720">
-            <a:spAutoFit/>
-          </a:bodyPr>
-          <a:lstStyle/>
-          <a:p>
-            <a:pPr algn="l">
-              <a:lnSpc>
-                <a:spcPct val="115000"/>
-              </a:lnSpc>
-            </a:pPr>
-            <a:r>
-              <a:rPr sz="2200" b="0">
-                <a:solidFill>
-                  <a:srgbClr val="EA851B"/>
-                </a:solidFill>
-                <a:latin typeface="Pretendard Black"/>
-              </a:rPr>
-              <a:t>안정화 레시피</a:t>
-            </a:r>
-          </a:p>
-        </p:txBody>
-      </p:sp>
-      <p:sp>
-        <p:nvSpPr>
-          <p:cNvPr id="9" name="TextBox 8"/>
-          <p:cNvSpPr txBox="1"/>
-          <p:nvPr/>
-        </p:nvSpPr>
-        <p:spPr>
-          <a:xfrm>
-            <a:off x="6400800" y="1920240"/>
-            <a:ext cx="5486400" cy="4572000"/>
-          </a:xfrm>
-          <a:prstGeom prst="rect">
-            <a:avLst/>
-          </a:prstGeom>
-          <a:noFill/>
-        </p:spPr>
-        <p:txBody>
-          <a:bodyPr wrap="square">
-            <a:spAutoFit/>
-          </a:bodyPr>
-          <a:lstStyle/>
-          <a:p>
-            <a:pPr>
-              <a:lnSpc>
-                <a:spcPct val="130000"/>
-              </a:lnSpc>
-              <a:spcAft>
-                <a:spcPts val="600"/>
-              </a:spcAft>
-            </a:pPr>
-            <a:r>
-              <a:rPr sz="1600" b="0">
-                <a:solidFill>
-                  <a:srgbClr val="EA851B"/>
-                </a:solidFill>
-                <a:latin typeface="Pretendard ExtraBold"/>
-              </a:rPr>
-              <a:t>•  </a:t>
-            </a:r>
-            <a:r>
-              <a:rPr sz="1600" b="0">
-                <a:solidFill>
-                  <a:srgbClr val="181818"/>
-                </a:solidFill>
-                <a:latin typeface="Pretendard SemiBold"/>
-              </a:rPr>
-              <a:t>warmup (초반 재구성만, λ=0)</a:t>
-            </a:r>
-          </a:p>
-          <a:p>
-            <a:pPr>
-              <a:lnSpc>
-                <a:spcPct val="130000"/>
-              </a:lnSpc>
-              <a:spcAft>
-                <a:spcPts val="600"/>
-              </a:spcAft>
-            </a:pPr>
-            <a:r>
-              <a:rPr sz="1600" b="0">
-                <a:solidFill>
-                  <a:srgbClr val="EA851B"/>
-                </a:solidFill>
-                <a:latin typeface="Pretendard ExtraBold"/>
-              </a:rPr>
-              <a:t>•  </a:t>
-            </a:r>
-            <a:r>
-              <a:rPr sz="1600" b="0">
-                <a:solidFill>
-                  <a:srgbClr val="181818"/>
-                </a:solidFill>
-                <a:latin typeface="Pretendard SemiBold"/>
-              </a:rPr>
-              <a:t>작은 λ + decay</a:t>
-            </a:r>
-          </a:p>
-          <a:p>
-            <a:pPr>
-              <a:lnSpc>
-                <a:spcPct val="130000"/>
-              </a:lnSpc>
-              <a:spcAft>
-                <a:spcPts val="600"/>
-              </a:spcAft>
-            </a:pPr>
-            <a:r>
-              <a:rPr sz="1600" b="0">
-                <a:solidFill>
-                  <a:srgbClr val="EA851B"/>
-                </a:solidFill>
-                <a:latin typeface="Pretendard ExtraBold"/>
-              </a:rPr>
-              <a:t>•  </a:t>
-            </a:r>
-            <a:r>
-              <a:rPr sz="1600" b="0">
-                <a:solidFill>
-                  <a:srgbClr val="181818"/>
-                </a:solidFill>
-                <a:latin typeface="Pretendard SemiBold"/>
-              </a:rPr>
-              <a:t>spectral norm · 균형 lr</a:t>
-            </a:r>
-          </a:p>
-          <a:p>
-            <a:pPr>
-              <a:lnSpc>
-                <a:spcPct val="130000"/>
-              </a:lnSpc>
-              <a:spcAft>
-                <a:spcPts val="600"/>
-              </a:spcAft>
-            </a:pPr>
-            <a:r>
-              <a:rPr sz="1600" b="0">
-                <a:solidFill>
-                  <a:srgbClr val="EA851B"/>
-                </a:solidFill>
-                <a:latin typeface="Pretendard ExtraBold"/>
-              </a:rPr>
-              <a:t>•  </a:t>
-            </a:r>
-            <a:r>
-              <a:rPr sz="1600" b="0">
-                <a:solidFill>
-                  <a:srgbClr val="181818"/>
-                </a:solidFill>
-                <a:latin typeface="Pretendard SemiBold"/>
-              </a:rPr>
-              <a:t>D/G 손실 곡선 모니터링</a:t>
+              <a:t>전체 손실:  L_G = 1.0·L1 (정확도) + 0.3·SSIM (구조) + λ·adversarial (사실감),  λ ≈ 0.1</a:t>
             </a:r>
           </a:p>
         </p:txBody>
@@ -3848,7 +3677,7 @@
                 </a:solidFill>
                 <a:latin typeface="Pretendard Black"/>
               </a:rPr>
-              <a:t>학습이 진행되며 흐림이 걷힌다</a:t>
+              <a:t>§4 줄다리기를 무너지지 않게</a:t>
             </a:r>
           </a:p>
         </p:txBody>
@@ -3969,45 +3798,21 @@
                 </a:solidFill>
                 <a:latin typeface="Pretendard Medium"/>
               </a:rPr>
-              <a:t>11 / 14</a:t>
-            </a:r>
-          </a:p>
-        </p:txBody>
-      </p:sp>
-      <p:pic>
-        <p:nvPicPr>
-          <p:cNvPr id="6" name="Picture 5" descr="W3_progression_strip.png"/>
-          <p:cNvPicPr>
-            <a:picLocks noChangeAspect="1"/>
-          </p:cNvPicPr>
-          <p:nvPr/>
-        </p:nvPicPr>
-        <p:blipFill>
-          <a:blip r:embed="rId2"/>
-          <a:stretch>
-            <a:fillRect/>
-          </a:stretch>
-        </p:blipFill>
-        <p:spPr>
-          <a:xfrm>
-            <a:off x="548640" y="2011680"/>
-            <a:ext cx="11064240" cy="2877147"/>
-          </a:xfrm>
-          <a:prstGeom prst="rect">
-            <a:avLst/>
-          </a:prstGeom>
-        </p:spPr>
-      </p:pic>
-      <p:sp>
-        <p:nvSpPr>
-          <p:cNvPr id="7" name="TextBox 6"/>
+              <a:t>11 / 17</a:t>
+            </a:r>
+          </a:p>
+        </p:txBody>
+      </p:sp>
+      <p:sp>
+        <p:nvSpPr>
+          <p:cNvPr id="6" name="TextBox 5"/>
           <p:cNvSpPr txBox="1"/>
           <p:nvPr/>
         </p:nvSpPr>
         <p:spPr>
           <a:xfrm>
-            <a:off x="548640" y="5303520"/>
-            <a:ext cx="10972800" cy="548640"/>
+            <a:off x="548640" y="1371600"/>
+            <a:ext cx="5486400" cy="457200"/>
           </a:xfrm>
           <a:prstGeom prst="rect">
             <a:avLst/>
@@ -4026,13 +3831,294 @@
               </a:lnSpc>
             </a:pPr>
             <a:r>
-              <a:rPr sz="1400" b="0">
-                <a:solidFill>
-                  <a:srgbClr val="7A7A7A"/>
+              <a:rPr sz="2200" b="0">
+                <a:solidFill>
+                  <a:srgbClr val="EA851B"/>
+                </a:solidFill>
+                <a:latin typeface="Pretendard Black"/>
+              </a:rPr>
+              <a:t>실패 신호</a:t>
+            </a:r>
+          </a:p>
+        </p:txBody>
+      </p:sp>
+      <p:sp>
+        <p:nvSpPr>
+          <p:cNvPr id="7" name="TextBox 6"/>
+          <p:cNvSpPr txBox="1"/>
+          <p:nvPr/>
+        </p:nvSpPr>
+        <p:spPr>
+          <a:xfrm>
+            <a:off x="548640" y="1920240"/>
+            <a:ext cx="5486400" cy="4572000"/>
+          </a:xfrm>
+          <a:prstGeom prst="rect">
+            <a:avLst/>
+          </a:prstGeom>
+          <a:noFill/>
+        </p:spPr>
+        <p:txBody>
+          <a:bodyPr wrap="square">
+            <a:spAutoFit/>
+          </a:bodyPr>
+          <a:lstStyle/>
+          <a:p>
+            <a:pPr>
+              <a:lnSpc>
+                <a:spcPct val="130000"/>
+              </a:lnSpc>
+              <a:spcAft>
+                <a:spcPts val="600"/>
+              </a:spcAft>
+            </a:pPr>
+            <a:r>
+              <a:rPr sz="1600" b="0">
+                <a:solidFill>
+                  <a:srgbClr val="EA851B"/>
+                </a:solidFill>
+                <a:latin typeface="Pretendard ExtraBold"/>
+              </a:rPr>
+              <a:t>•  </a:t>
+            </a:r>
+            <a:r>
+              <a:rPr sz="1600" b="0">
+                <a:solidFill>
+                  <a:srgbClr val="181818"/>
                 </a:solidFill>
                 <a:latin typeface="Pretendard SemiBold"/>
               </a:rPr>
-              <a:t>warmup(회색) → GAN이 켜진 뒤 경계가 또렷 · 학생 mini 모델 실제 학습 스냅샷</a:t>
+              <a:t>D 손실 → 0 고착 (독주, G에 gradient 없음)</a:t>
+            </a:r>
+          </a:p>
+          <a:p>
+            <a:pPr>
+              <a:lnSpc>
+                <a:spcPct val="130000"/>
+              </a:lnSpc>
+              <a:spcAft>
+                <a:spcPts val="600"/>
+              </a:spcAft>
+            </a:pPr>
+            <a:r>
+              <a:rPr sz="1600" b="0">
+                <a:solidFill>
+                  <a:srgbClr val="EA851B"/>
+                </a:solidFill>
+                <a:latin typeface="Pretendard ExtraBold"/>
+              </a:rPr>
+              <a:t>•  </a:t>
+            </a:r>
+            <a:r>
+              <a:rPr sz="1600" b="0">
+                <a:solidFill>
+                  <a:srgbClr val="181818"/>
+                </a:solidFill>
+                <a:latin typeface="Pretendard SemiBold"/>
+              </a:rPr>
+              <a:t>손실 진동·NaN 발산</a:t>
+            </a:r>
+          </a:p>
+          <a:p>
+            <a:pPr>
+              <a:lnSpc>
+                <a:spcPct val="130000"/>
+              </a:lnSpc>
+              <a:spcAft>
+                <a:spcPts val="600"/>
+              </a:spcAft>
+            </a:pPr>
+            <a:r>
+              <a:rPr sz="1600" b="0">
+                <a:solidFill>
+                  <a:srgbClr val="EA851B"/>
+                </a:solidFill>
+                <a:latin typeface="Pretendard ExtraBold"/>
+              </a:rPr>
+              <a:t>•  </a:t>
+            </a:r>
+            <a:r>
+              <a:rPr sz="1600" b="0">
+                <a:solidFill>
+                  <a:srgbClr val="181818"/>
+                </a:solidFill>
+                <a:latin typeface="Pretendard SemiBold"/>
+              </a:rPr>
+              <a:t>mode collapse — 한 답만 반복</a:t>
+            </a:r>
+          </a:p>
+        </p:txBody>
+      </p:sp>
+      <p:sp>
+        <p:nvSpPr>
+          <p:cNvPr id="8" name="TextBox 7"/>
+          <p:cNvSpPr txBox="1"/>
+          <p:nvPr/>
+        </p:nvSpPr>
+        <p:spPr>
+          <a:xfrm>
+            <a:off x="6400800" y="1371600"/>
+            <a:ext cx="5486400" cy="457200"/>
+          </a:xfrm>
+          <a:prstGeom prst="rect">
+            <a:avLst/>
+          </a:prstGeom>
+          <a:noFill/>
+        </p:spPr>
+        <p:txBody>
+          <a:bodyPr wrap="square" lIns="45720" rIns="45720">
+            <a:spAutoFit/>
+          </a:bodyPr>
+          <a:lstStyle/>
+          <a:p>
+            <a:pPr algn="l">
+              <a:lnSpc>
+                <a:spcPct val="115000"/>
+              </a:lnSpc>
+            </a:pPr>
+            <a:r>
+              <a:rPr sz="2200" b="0">
+                <a:solidFill>
+                  <a:srgbClr val="EA851B"/>
+                </a:solidFill>
+                <a:latin typeface="Pretendard Black"/>
+              </a:rPr>
+              <a:t>안정화 레시피</a:t>
+            </a:r>
+          </a:p>
+        </p:txBody>
+      </p:sp>
+      <p:sp>
+        <p:nvSpPr>
+          <p:cNvPr id="9" name="TextBox 8"/>
+          <p:cNvSpPr txBox="1"/>
+          <p:nvPr/>
+        </p:nvSpPr>
+        <p:spPr>
+          <a:xfrm>
+            <a:off x="6400800" y="1920240"/>
+            <a:ext cx="5486400" cy="4572000"/>
+          </a:xfrm>
+          <a:prstGeom prst="rect">
+            <a:avLst/>
+          </a:prstGeom>
+          <a:noFill/>
+        </p:spPr>
+        <p:txBody>
+          <a:bodyPr wrap="square">
+            <a:spAutoFit/>
+          </a:bodyPr>
+          <a:lstStyle/>
+          <a:p>
+            <a:pPr>
+              <a:lnSpc>
+                <a:spcPct val="130000"/>
+              </a:lnSpc>
+              <a:spcAft>
+                <a:spcPts val="600"/>
+              </a:spcAft>
+            </a:pPr>
+            <a:r>
+              <a:rPr sz="1600" b="0">
+                <a:solidFill>
+                  <a:srgbClr val="EA851B"/>
+                </a:solidFill>
+                <a:latin typeface="Pretendard ExtraBold"/>
+              </a:rPr>
+              <a:t>•  </a:t>
+            </a:r>
+            <a:r>
+              <a:rPr sz="1600" b="0">
+                <a:solidFill>
+                  <a:srgbClr val="181818"/>
+                </a:solidFill>
+                <a:latin typeface="Pretendard SemiBold"/>
+              </a:rPr>
+              <a:t>warmup: 초반 λ=0</a:t>
+            </a:r>
+          </a:p>
+          <a:p>
+            <a:pPr>
+              <a:lnSpc>
+                <a:spcPct val="130000"/>
+              </a:lnSpc>
+              <a:spcAft>
+                <a:spcPts val="600"/>
+              </a:spcAft>
+            </a:pPr>
+            <a:r>
+              <a:rPr sz="1600" b="0">
+                <a:solidFill>
+                  <a:srgbClr val="EA851B"/>
+                </a:solidFill>
+                <a:latin typeface="Pretendard ExtraBold"/>
+              </a:rPr>
+              <a:t>•  </a:t>
+            </a:r>
+            <a:r>
+              <a:rPr sz="1600" b="0">
+                <a:solidFill>
+                  <a:srgbClr val="181818"/>
+                </a:solidFill>
+                <a:latin typeface="Pretendard SemiBold"/>
+              </a:rPr>
+              <a:t>작은 λ(≈0.1) + 후반 감쇠</a:t>
+            </a:r>
+          </a:p>
+          <a:p>
+            <a:pPr>
+              <a:lnSpc>
+                <a:spcPct val="130000"/>
+              </a:lnSpc>
+              <a:spcAft>
+                <a:spcPts val="600"/>
+              </a:spcAft>
+            </a:pPr>
+            <a:r>
+              <a:rPr sz="1600" b="0">
+                <a:solidFill>
+                  <a:srgbClr val="EA851B"/>
+                </a:solidFill>
+                <a:latin typeface="Pretendard ExtraBold"/>
+              </a:rPr>
+              <a:t>•  </a:t>
+            </a:r>
+            <a:r>
+              <a:rPr sz="1600" b="0">
+                <a:solidFill>
+                  <a:srgbClr val="181818"/>
+                </a:solidFill>
+                <a:latin typeface="Pretendard SemiBold"/>
+              </a:rPr>
+              <a:t>spectral norm · 균형 lr(2e-4)</a:t>
+            </a:r>
+          </a:p>
+          <a:p>
+            <a:pPr>
+              <a:lnSpc>
+                <a:spcPct val="130000"/>
+              </a:lnSpc>
+              <a:spcAft>
+                <a:spcPts val="600"/>
+              </a:spcAft>
+            </a:pPr>
+            <a:r>
+              <a:rPr sz="1600" b="0">
+                <a:solidFill>
+                  <a:srgbClr val="EA851B"/>
+                </a:solidFill>
+                <a:latin typeface="Pretendard ExtraBold"/>
+              </a:rPr>
+              <a:t>•  </a:t>
+            </a:r>
+            <a:r>
+              <a:rPr sz="1600" b="0">
+                <a:solidFill>
+                  <a:srgbClr val="181818"/>
+                </a:solidFill>
+                <a:latin typeface="Pretendard SemiBold"/>
+              </a:rPr>
+              <a:t>곡선 모니터링 · detach</a:t>
             </a:r>
           </a:p>
         </p:txBody>
@@ -4089,7 +4175,7 @@
                 </a:solidFill>
                 <a:latin typeface="Pretendard Black"/>
               </a:rPr>
-              <a:t>GAN은 구조를 복원해 물성까지 개선</a:t>
+              <a:t>실측 — 균형 잡힌 줄다리기의 곡선</a:t>
             </a:r>
           </a:p>
         </p:txBody>
@@ -4210,14 +4296,14 @@
                 </a:solidFill>
                 <a:latin typeface="Pretendard Medium"/>
               </a:rPr>
-              <a:t>12 / 14</a:t>
+              <a:t>12 / 17</a:t>
             </a:r>
           </a:p>
         </p:txBody>
       </p:sp>
       <p:pic>
         <p:nvPicPr>
-          <p:cNvPr id="6" name="Picture 5" descr="W3_transition_panel.png"/>
+          <p:cNvPr id="6" name="Picture 5" descr="W3_training_curves.png"/>
           <p:cNvPicPr>
             <a:picLocks noChangeAspect="1"/>
           </p:cNvPicPr>
@@ -4231,8 +4317,8 @@
         </p:blipFill>
         <p:spPr>
           <a:xfrm>
-            <a:off x="365760" y="1371600"/>
-            <a:ext cx="7498079" cy="4064446"/>
+            <a:off x="822960" y="1371600"/>
+            <a:ext cx="10515600" cy="4002336"/>
           </a:xfrm>
           <a:prstGeom prst="rect">
             <a:avLst/>
@@ -4247,8 +4333,8 @@
         </p:nvSpPr>
         <p:spPr>
           <a:xfrm>
-            <a:off x="7955279" y="1737360"/>
-            <a:ext cx="3931920" cy="4206240"/>
+            <a:off x="822960" y="5943600"/>
+            <a:ext cx="10515600" cy="457200"/>
           </a:xfrm>
           <a:prstGeom prst="rect">
             <a:avLst/>
@@ -4256,176 +4342,24 @@
           <a:noFill/>
         </p:spPr>
         <p:txBody>
-          <a:bodyPr wrap="square">
+          <a:bodyPr wrap="square" lIns="45720" rIns="45720">
             <a:spAutoFit/>
           </a:bodyPr>
           <a:lstStyle/>
           <a:p>
-            <a:pPr>
-              <a:lnSpc>
-                <a:spcPct val="130000"/>
-              </a:lnSpc>
-              <a:spcAft>
-                <a:spcPts val="600"/>
-              </a:spcAft>
-            </a:pPr>
-            <a:r>
-              <a:rPr sz="1400" b="0">
-                <a:solidFill>
-                  <a:srgbClr val="EA851B"/>
-                </a:solidFill>
-                <a:latin typeface="Pretendard ExtraBold"/>
-              </a:rPr>
-              <a:t>•  </a:t>
-            </a:r>
-            <a:r>
-              <a:rPr sz="1400" b="0">
-                <a:solidFill>
-                  <a:srgbClr val="181818"/>
+            <a:pPr algn="l">
+              <a:lnSpc>
+                <a:spcPct val="115000"/>
+              </a:lnSpc>
+            </a:pPr>
+            <a:r>
+              <a:rPr sz="1300" b="0">
+                <a:solidFill>
+                  <a:srgbClr val="7A7A7A"/>
                 </a:solidFill>
                 <a:latin typeface="Pretendard SemiBold"/>
               </a:rPr>
-              <a:t>볼륨 |Δφ|: 선형 3.10 → UNet 0.30 → GAN 0.19</a:t>
-            </a:r>
-          </a:p>
-          <a:p>
-            <a:pPr>
-              <a:lnSpc>
-                <a:spcPct val="130000"/>
-              </a:lnSpc>
-              <a:spcAft>
-                <a:spcPts val="600"/>
-              </a:spcAft>
-            </a:pPr>
-            <a:r>
-              <a:rPr sz="1400" b="0">
-                <a:solidFill>
-                  <a:srgbClr val="EA851B"/>
-                </a:solidFill>
-                <a:latin typeface="Pretendard ExtraBold"/>
-              </a:rPr>
-              <a:t>•  </a:t>
-            </a:r>
-            <a:r>
-              <a:rPr sz="1400" b="0">
-                <a:solidFill>
-                  <a:srgbClr val="181818"/>
-                </a:solidFill>
-                <a:latin typeface="Pretendard SemiBold"/>
-              </a:rPr>
-              <a:t>GAN이 흐림 없애 구조를 사실적으로 복원</a:t>
-            </a:r>
-          </a:p>
-          <a:p>
-            <a:pPr>
-              <a:lnSpc>
-                <a:spcPct val="130000"/>
-              </a:lnSpc>
-              <a:spcAft>
-                <a:spcPts val="600"/>
-              </a:spcAft>
-            </a:pPr>
-            <a:r>
-              <a:rPr sz="1400" b="0">
-                <a:solidFill>
-                  <a:srgbClr val="EA851B"/>
-                </a:solidFill>
-                <a:latin typeface="Pretendard ExtraBold"/>
-              </a:rPr>
-              <a:t>•  </a:t>
-            </a:r>
-            <a:r>
-              <a:rPr sz="1400" b="0">
-                <a:solidFill>
-                  <a:srgbClr val="181818"/>
-                </a:solidFill>
-                <a:latin typeface="Pretendard SemiBold"/>
-              </a:rPr>
-              <a:t>→ |Δφ|와 투과율·S2 물성 함께 개선 (연구 핵심)</a:t>
-            </a:r>
-          </a:p>
-          <a:p>
-            <a:pPr>
-              <a:lnSpc>
-                <a:spcPct val="130000"/>
-              </a:lnSpc>
-              <a:spcAft>
-                <a:spcPts val="600"/>
-              </a:spcAft>
-            </a:pPr>
-            <a:r>
-              <a:rPr sz="1400" b="0">
-                <a:solidFill>
-                  <a:srgbClr val="EA851B"/>
-                </a:solidFill>
-                <a:latin typeface="Pretendard ExtraBold"/>
-              </a:rPr>
-              <a:t>•  </a:t>
-            </a:r>
-            <a:r>
-              <a:rPr sz="1400" b="0">
-                <a:solidFill>
-                  <a:srgbClr val="181818"/>
-                </a:solidFill>
-                <a:latin typeface="Pretendard SemiBold"/>
-              </a:rPr>
-              <a:t>그래도 |Δφ| 하나론 부족:</a:t>
-            </a:r>
-          </a:p>
-          <a:p>
-            <a:pPr>
-              <a:lnSpc>
-                <a:spcPct val="130000"/>
-              </a:lnSpc>
-              <a:spcAft>
-                <a:spcPts val="600"/>
-              </a:spcAft>
-            </a:pPr>
-            <a:r>
-              <a:rPr sz="1400" b="0">
-                <a:solidFill>
-                  <a:srgbClr val="EA851B"/>
-                </a:solidFill>
-                <a:latin typeface="Pretendard ExtraBold"/>
-              </a:rPr>
-              <a:t>•  </a:t>
-            </a:r>
-            <a:r>
-              <a:rPr sz="1400" b="0">
-                <a:solidFill>
-                  <a:srgbClr val="181818"/>
-                </a:solidFill>
-                <a:latin typeface="Pretendard SemiBold"/>
-              </a:rPr>
-              <a:t>  같은 |Δφ|라도 연결성 다르면 투과율 다름</a:t>
-            </a:r>
-          </a:p>
-          <a:p>
-            <a:pPr>
-              <a:lnSpc>
-                <a:spcPct val="130000"/>
-              </a:lnSpc>
-              <a:spcAft>
-                <a:spcPts val="600"/>
-              </a:spcAft>
-            </a:pPr>
-            <a:r>
-              <a:rPr sz="1400" b="0">
-                <a:solidFill>
-                  <a:srgbClr val="EA851B"/>
-                </a:solidFill>
-                <a:latin typeface="Pretendard ExtraBold"/>
-              </a:rPr>
-              <a:t>•  </a:t>
-            </a:r>
-            <a:r>
-              <a:rPr sz="1400" b="0">
-                <a:solidFill>
-                  <a:srgbClr val="181818"/>
-                </a:solidFill>
-                <a:latin typeface="Pretendard SemiBold"/>
-              </a:rPr>
-              <a:t>→ 물리 지표로 평가 (S2·투과율, W5)</a:t>
+              <a:t>GAN 시작 후에도 재구성 손실은 계속 하강, D 손실은 0에 붙지 않고 0.3~0.5로 회복.</a:t>
             </a:r>
           </a:p>
         </p:txBody>
@@ -4482,7 +4416,7 @@
                 </a:solidFill>
                 <a:latin typeface="Pretendard Black"/>
               </a:rPr>
-              <a:t>코드로 직접 — 두 경로</a:t>
+              <a:t>§5 검증 1 — 차이가 큰 곳을 짚어서</a:t>
             </a:r>
           </a:p>
         </p:txBody>
@@ -4603,52 +4537,35 @@
                 </a:solidFill>
                 <a:latin typeface="Pretendard Medium"/>
               </a:rPr>
-              <a:t>13 / 14</a:t>
-            </a:r>
-          </a:p>
-        </p:txBody>
-      </p:sp>
-      <p:sp>
-        <p:nvSpPr>
-          <p:cNvPr id="6" name="Rounded Rectangle 5"/>
-          <p:cNvSpPr/>
-          <p:nvPr/>
-        </p:nvSpPr>
-        <p:spPr>
-          <a:xfrm>
-            <a:off x="640080" y="1463040"/>
-            <a:ext cx="6583680" cy="2377440"/>
-          </a:xfrm>
-          <a:prstGeom prst="roundRect">
-            <a:avLst/>
-          </a:prstGeom>
-          <a:solidFill>
-            <a:srgbClr val="F6F6F6"/>
-          </a:solidFill>
-          <a:ln>
-            <a:noFill/>
-          </a:ln>
-        </p:spPr>
-        <p:style>
-          <a:lnRef idx="1">
-            <a:schemeClr val="accent1"/>
-          </a:lnRef>
-          <a:fillRef idx="3">
-            <a:schemeClr val="accent1"/>
-          </a:fillRef>
-          <a:effectRef idx="2">
-            <a:schemeClr val="accent1"/>
-          </a:effectRef>
-          <a:fontRef idx="minor">
-            <a:schemeClr val="lt1"/>
-          </a:fontRef>
-        </p:style>
-        <p:txBody>
-          <a:bodyPr rtlCol="0" anchor="ctr"/>
-          <a:lstStyle/>
-          <a:p/>
-        </p:txBody>
-      </p:sp>
+              <a:t>13 / 17</a:t>
+            </a:r>
+          </a:p>
+        </p:txBody>
+      </p:sp>
+      <p:pic>
+        <p:nvPicPr>
+          <p:cNvPr id="6" name="Picture 5" descr="W3_gan_zoom_v2.png"/>
+          <p:cNvPicPr>
+            <a:picLocks noChangeAspect="1"/>
+          </p:cNvPicPr>
+          <p:nvPr/>
+        </p:nvPicPr>
+        <p:blipFill>
+          <a:blip r:embed="rId2"/>
+          <a:stretch>
+            <a:fillRect/>
+          </a:stretch>
+        </p:blipFill>
+        <p:spPr>
+          <a:xfrm>
+            <a:off x="2194560" y="1280160"/>
+            <a:ext cx="7772400" cy="5492496"/>
+          </a:xfrm>
+          <a:prstGeom prst="rect">
+            <a:avLst/>
+          </a:prstGeom>
+        </p:spPr>
+      </p:pic>
       <p:sp>
         <p:nvSpPr>
           <p:cNvPr id="7" name="TextBox 6"/>
@@ -4657,8 +4574,8 @@
         </p:nvSpPr>
         <p:spPr>
           <a:xfrm>
-            <a:off x="640080" y="1463040"/>
-            <a:ext cx="6583680" cy="2377440"/>
+            <a:off x="2194560" y="6217920"/>
+            <a:ext cx="7772400" cy="457200"/>
           </a:xfrm>
           <a:prstGeom prst="rect">
             <a:avLst/>
@@ -4666,239 +4583,24 @@
           <a:noFill/>
         </p:spPr>
         <p:txBody>
-          <a:bodyPr wrap="square" lIns="137160" tIns="91440" bIns="91440">
+          <a:bodyPr wrap="square" lIns="45720" rIns="45720">
             <a:spAutoFit/>
           </a:bodyPr>
           <a:lstStyle/>
           <a:p>
-            <a:pPr>
-              <a:lnSpc>
-                <a:spcPct val="120000"/>
-              </a:lnSpc>
-            </a:pPr>
-            <a:r>
-              <a:rPr sz="1500" b="0">
-                <a:solidFill>
-                  <a:srgbClr val="181818"/>
-                </a:solidFill>
-                <a:latin typeface="Consolas"/>
-              </a:rPr>
-              <a:t># 경로① 처음부터</a:t>
-            </a:r>
-          </a:p>
-          <a:p>
-            <a:pPr>
-              <a:lnSpc>
-                <a:spcPct val="120000"/>
-              </a:lnSpc>
-            </a:pPr>
-            <a:r>
-              <a:rPr sz="1500" b="0">
-                <a:solidFill>
-                  <a:srgbClr val="181818"/>
-                </a:solidFill>
-                <a:latin typeface="Consolas"/>
-              </a:rPr>
-              <a:t>G,D,h = train_gan(bb, k=5, lambda_gan=0.1)</a:t>
-            </a:r>
-          </a:p>
-          <a:p>
-            <a:pPr>
-              <a:lnSpc>
-                <a:spcPct val="120000"/>
-              </a:lnSpc>
-            </a:pPr>
-            <a:r>
-              <a:rPr sz="1500" b="0">
-                <a:solidFill>
-                  <a:srgbClr val="181818"/>
-                </a:solidFill>
-                <a:latin typeface="Consolas"/>
-              </a:rPr>
-              <a:t/>
-            </a:r>
-          </a:p>
-          <a:p>
-            <a:pPr>
-              <a:lnSpc>
-                <a:spcPct val="120000"/>
-              </a:lnSpc>
-            </a:pPr>
-            <a:r>
-              <a:rPr sz="1500" b="0">
-                <a:solidFill>
-                  <a:srgbClr val="181818"/>
-                </a:solidFill>
-                <a:latin typeface="Consolas"/>
-              </a:rPr>
-              <a:t># 경로② W2 이어받아 미세조정</a:t>
-            </a:r>
-          </a:p>
-          <a:p>
-            <a:pPr>
-              <a:lnSpc>
-                <a:spcPct val="120000"/>
-              </a:lnSpc>
-            </a:pPr>
-            <a:r>
-              <a:rPr sz="1500" b="0">
-                <a:solidFill>
-                  <a:srgbClr val="181818"/>
-                </a:solidFill>
-                <a:latin typeface="Consolas"/>
-              </a:rPr>
-              <a:t>G0,_ = load_ckpt('unet_mini_fast.pth')</a:t>
-            </a:r>
-          </a:p>
-          <a:p>
-            <a:pPr>
-              <a:lnSpc>
-                <a:spcPct val="120000"/>
-              </a:lnSpc>
-            </a:pPr>
-            <a:r>
-              <a:rPr sz="1500" b="0">
-                <a:solidFill>
-                  <a:srgbClr val="181818"/>
-                </a:solidFill>
-                <a:latin typeface="Consolas"/>
-              </a:rPr>
-              <a:t>G,D,h = train_gan(bb, generator=G0, lambda_gan=0.1)</a:t>
-            </a:r>
-          </a:p>
-        </p:txBody>
-      </p:sp>
-      <p:sp>
-        <p:nvSpPr>
-          <p:cNvPr id="8" name="TextBox 7"/>
-          <p:cNvSpPr txBox="1"/>
-          <p:nvPr/>
-        </p:nvSpPr>
-        <p:spPr>
-          <a:xfrm>
-            <a:off x="7498079" y="1737360"/>
-            <a:ext cx="4206240" cy="4114800"/>
-          </a:xfrm>
-          <a:prstGeom prst="rect">
-            <a:avLst/>
-          </a:prstGeom>
-          <a:noFill/>
-        </p:spPr>
-        <p:txBody>
-          <a:bodyPr wrap="square">
-            <a:spAutoFit/>
-          </a:bodyPr>
-          <a:lstStyle/>
-          <a:p>
-            <a:pPr>
-              <a:lnSpc>
-                <a:spcPct val="130000"/>
-              </a:lnSpc>
-              <a:spcAft>
-                <a:spcPts val="600"/>
-              </a:spcAft>
-            </a:pPr>
-            <a:r>
-              <a:rPr sz="1600" b="0">
-                <a:solidFill>
-                  <a:srgbClr val="EA851B"/>
-                </a:solidFill>
-                <a:latin typeface="Pretendard ExtraBold"/>
-              </a:rPr>
-              <a:t>•  </a:t>
-            </a:r>
-            <a:r>
-              <a:rPr sz="1600" b="0">
-                <a:solidFill>
-                  <a:srgbClr val="181818"/>
+            <a:pPr algn="l">
+              <a:lnSpc>
+                <a:spcPct val="115000"/>
+              </a:lnSpc>
+            </a:pPr>
+            <a:r>
+              <a:rPr sz="1300" b="0">
+                <a:solidFill>
+                  <a:srgbClr val="7A7A7A"/>
                 </a:solidFill>
                 <a:latin typeface="Pretendard SemiBold"/>
               </a:rPr>
-              <a:t>PatchDiscriminatorMini · train_gan</a:t>
-            </a:r>
-          </a:p>
-          <a:p>
-            <a:pPr>
-              <a:lnSpc>
-                <a:spcPct val="130000"/>
-              </a:lnSpc>
-              <a:spcAft>
-                <a:spcPts val="600"/>
-              </a:spcAft>
-            </a:pPr>
-            <a:r>
-              <a:rPr sz="1600" b="0">
-                <a:solidFill>
-                  <a:srgbClr val="EA851B"/>
-                </a:solidFill>
-                <a:latin typeface="Pretendard ExtraBold"/>
-              </a:rPr>
-              <a:t>•  </a:t>
-            </a:r>
-            <a:r>
-              <a:rPr sz="1600" b="0">
-                <a:solidFill>
-                  <a:srgbClr val="181818"/>
-                </a:solidFill>
-                <a:latin typeface="Pretendard SemiBold"/>
-              </a:rPr>
-              <a:t>d_hinge_loss / g_hinge_loss · ssim_loss</a:t>
-            </a:r>
-          </a:p>
-          <a:p>
-            <a:pPr>
-              <a:lnSpc>
-                <a:spcPct val="130000"/>
-              </a:lnSpc>
-              <a:spcAft>
-                <a:spcPts val="600"/>
-              </a:spcAft>
-            </a:pPr>
-            <a:r>
-              <a:rPr sz="1600" b="0">
-                <a:solidFill>
-                  <a:srgbClr val="EA851B"/>
-                </a:solidFill>
-                <a:latin typeface="Pretendard ExtraBold"/>
-              </a:rPr>
-              <a:t>•  </a:t>
-            </a:r>
-            <a:r>
-              <a:rPr sz="1600" b="0">
-                <a:solidFill>
-                  <a:srgbClr val="181818"/>
-                </a:solidFill>
-                <a:latin typeface="Pretendard SemiBold"/>
-              </a:rPr>
-              <a:t>predict_continuous (연속 출력)</a:t>
-            </a:r>
-          </a:p>
-          <a:p>
-            <a:pPr>
-              <a:lnSpc>
-                <a:spcPct val="130000"/>
-              </a:lnSpc>
-              <a:spcAft>
-                <a:spcPts val="600"/>
-              </a:spcAft>
-            </a:pPr>
-            <a:r>
-              <a:rPr sz="1600" b="0">
-                <a:solidFill>
-                  <a:srgbClr val="EA851B"/>
-                </a:solidFill>
-                <a:latin typeface="Pretendard ExtraBold"/>
-              </a:rPr>
-              <a:t>•  </a:t>
-            </a:r>
-            <a:r>
-              <a:rPr sz="1600" b="0">
-                <a:solidFill>
-                  <a:srgbClr val="181818"/>
-                </a:solidFill>
-                <a:latin typeface="Pretendard SemiBold"/>
-              </a:rPr>
-              <a:t>warmup·λ·spectral norm 내장</a:t>
+              <a:t>가운데 원: GAN 없음은 pore를 끊어 가짜 solid 섬(오류 140px), GAN은 정답과 거의 동일(3px).</a:t>
             </a:r>
           </a:p>
         </p:txBody>
@@ -4955,7 +4657,7 @@
                 </a:solidFill>
                 <a:latin typeface="Pretendard Black"/>
               </a:rPr>
-              <a:t>정리 · 탐구 과제 · 다음 주</a:t>
+              <a:t>§5 검증 2·3 — 공극률과 구조 통계 S2</a:t>
             </a:r>
           </a:p>
         </p:txBody>
@@ -5076,21 +4778,45 @@
                 </a:solidFill>
                 <a:latin typeface="Pretendard Medium"/>
               </a:rPr>
-              <a:t>14 / 14</a:t>
-            </a:r>
-          </a:p>
-        </p:txBody>
-      </p:sp>
-      <p:sp>
-        <p:nvSpPr>
-          <p:cNvPr id="6" name="TextBox 5"/>
+              <a:t>14 / 17</a:t>
+            </a:r>
+          </a:p>
+        </p:txBody>
+      </p:sp>
+      <p:pic>
+        <p:nvPicPr>
+          <p:cNvPr id="6" name="Picture 5" descr="W3_s2_curves.png"/>
+          <p:cNvPicPr>
+            <a:picLocks noChangeAspect="1"/>
+          </p:cNvPicPr>
+          <p:nvPr/>
+        </p:nvPicPr>
+        <p:blipFill>
+          <a:blip r:embed="rId2"/>
+          <a:stretch>
+            <a:fillRect/>
+          </a:stretch>
+        </p:blipFill>
+        <p:spPr>
+          <a:xfrm>
+            <a:off x="548640" y="1463040"/>
+            <a:ext cx="7863840" cy="3427427"/>
+          </a:xfrm>
+          <a:prstGeom prst="rect">
+            <a:avLst/>
+          </a:prstGeom>
+        </p:spPr>
+      </p:pic>
+      <p:sp>
+        <p:nvSpPr>
+          <p:cNvPr id="7" name="TextBox 6"/>
           <p:cNvSpPr txBox="1"/>
           <p:nvPr/>
         </p:nvSpPr>
         <p:spPr>
           <a:xfrm>
-            <a:off x="731520" y="1554480"/>
-            <a:ext cx="10972800" cy="4389120"/>
+            <a:off x="8595360" y="1828800"/>
+            <a:ext cx="3383280" cy="3840480"/>
           </a:xfrm>
           <a:prstGeom prst="rect">
             <a:avLst/>
@@ -5112,7 +4838,7 @@
               </a:spcAft>
             </a:pPr>
             <a:r>
-              <a:rPr sz="1800" b="0">
+              <a:rPr sz="1400" b="0">
                 <a:solidFill>
                   <a:srgbClr val="EA851B"/>
                 </a:solidFill>
@@ -5121,13 +4847,13 @@
               <a:t>•  </a:t>
             </a:r>
             <a:r>
-              <a:rPr sz="1800" b="0">
+              <a:rPr sz="1400" b="0">
                 <a:solidFill>
                   <a:srgbClr val="181818"/>
                 </a:solidFill>
                 <a:latin typeface="Pretendard SemiBold"/>
               </a:rPr>
-              <a:t>핵심: L1은 평균의 함정으로 흐림 → GAN이 사실적 구조 회복</a:t>
+              <a:t>볼륨 |Δφ|: 선형 3.10 → UNet 0.30 → GAN 0.19 %p</a:t>
             </a:r>
           </a:p>
           <a:p>
@@ -5140,7 +4866,7 @@
               </a:spcAft>
             </a:pPr>
             <a:r>
-              <a:rPr sz="1800" b="0">
+              <a:rPr sz="1400" b="0">
                 <a:solidFill>
                   <a:srgbClr val="EA851B"/>
                 </a:solidFill>
@@ -5149,13 +4875,13 @@
               <a:t>•  </a:t>
             </a:r>
             <a:r>
-              <a:rPr sz="1800" b="0">
+              <a:rPr sz="1400" b="0">
                 <a:solidFill>
                   <a:srgbClr val="181818"/>
                 </a:solidFill>
                 <a:latin typeface="Pretendard SemiBold"/>
               </a:rPr>
-              <a:t>"좋은 숫자 ≠ 좋은 복원" — 지표가 전부를 담지 못한다</a:t>
+              <a:t>S2 평균 편차: GAN 5.5e-4 (GT 최근접)</a:t>
             </a:r>
           </a:p>
           <a:p>
@@ -5168,7 +4894,7 @@
               </a:spcAft>
             </a:pPr>
             <a:r>
-              <a:rPr sz="1800" b="0">
+              <a:rPr sz="1400" b="0">
                 <a:solidFill>
                   <a:srgbClr val="EA851B"/>
                 </a:solidFill>
@@ -5177,13 +4903,13 @@
               <a:t>•  </a:t>
             </a:r>
             <a:r>
-              <a:rPr sz="1800" b="0">
+              <a:rPr sz="1400" b="0">
                 <a:solidFill>
                   <a:srgbClr val="181818"/>
                 </a:solidFill>
                 <a:latin typeface="Pretendard SemiBold"/>
               </a:rPr>
-              <a:t>과제 1(필수) GAN 있음/없음 경계 비교</a:t>
+              <a:t>선형 대비 약 37배 — 단 UNet과는 근소</a:t>
             </a:r>
           </a:p>
           <a:p>
@@ -5196,7 +4922,7 @@
               </a:spcAft>
             </a:pPr>
             <a:r>
-              <a:rPr sz="1800" b="0">
+              <a:rPr sz="1400" b="0">
                 <a:solidFill>
                   <a:srgbClr val="EA851B"/>
                 </a:solidFill>
@@ -5205,15 +4931,457 @@
               <a:t>•  </a:t>
             </a:r>
             <a:r>
-              <a:rPr sz="1800" b="0">
+              <a:rPr sz="1400" b="0">
                 <a:solidFill>
                   <a:srgbClr val="181818"/>
                 </a:solidFill>
                 <a:latin typeface="Pretendard SemiBold"/>
               </a:rPr>
-              <a:t>과제 2(필수) λ sweep 선명도↔|Δφ| trade-off</a:t>
-            </a:r>
-          </a:p>
+              <a:t>결정적 차이는 흐름 물리에서</a:t>
+            </a:r>
+          </a:p>
+        </p:txBody>
+      </p:sp>
+    </p:spTree>
+  </p:cSld>
+  <p:clrMapOvr>
+    <a:masterClrMapping/>
+  </p:clrMapOvr>
+</p:sld>
+</file>
+
+<file path=ppt/slides/slide15.xml><?xml version="1.0" encoding="utf-8"?>
+<p:sld xmlns:a="http://schemas.openxmlformats.org/drawingml/2006/main" xmlns:p="http://schemas.openxmlformats.org/presentationml/2006/main" xmlns:r="http://schemas.openxmlformats.org/officeDocument/2006/relationships">
+  <p:cSld>
+    <p:spTree>
+      <p:nvGrpSpPr>
+        <p:cNvPr id="1" name=""/>
+        <p:cNvGrpSpPr/>
+        <p:nvPr/>
+      </p:nvGrpSpPr>
+      <p:grpSpPr/>
+      <p:sp>
+        <p:nvSpPr>
+          <p:cNvPr id="2" name="TextBox 1"/>
+          <p:cNvSpPr txBox="1"/>
+          <p:nvPr/>
+        </p:nvSpPr>
+        <p:spPr>
+          <a:xfrm>
+            <a:off x="457200" y="320040"/>
+            <a:ext cx="11430000" cy="640080"/>
+          </a:xfrm>
+          <a:prstGeom prst="rect">
+            <a:avLst/>
+          </a:prstGeom>
+          <a:noFill/>
+        </p:spPr>
+        <p:txBody>
+          <a:bodyPr wrap="square" lIns="45720" rIns="45720">
+            <a:spAutoFit/>
+          </a:bodyPr>
+          <a:lstStyle/>
+          <a:p>
+            <a:pPr algn="l">
+              <a:lnSpc>
+                <a:spcPct val="115000"/>
+              </a:lnSpc>
+            </a:pPr>
+            <a:r>
+              <a:rPr sz="2800" b="0">
+                <a:solidFill>
+                  <a:srgbClr val="EA851B"/>
+                </a:solidFill>
+                <a:latin typeface="Pretendard Black"/>
+              </a:rPr>
+              <a:t>§5 검증 4 — 투과율 (LBM, 8개 도메인)</a:t>
+            </a:r>
+          </a:p>
+        </p:txBody>
+      </p:sp>
+      <p:sp>
+        <p:nvSpPr>
+          <p:cNvPr id="3" name="Rectangle 2"/>
+          <p:cNvSpPr/>
+          <p:nvPr/>
+        </p:nvSpPr>
+        <p:spPr>
+          <a:xfrm>
+            <a:off x="502920" y="960120"/>
+            <a:ext cx="1097280" cy="54864"/>
+          </a:xfrm>
+          <a:prstGeom prst="rect">
+            <a:avLst/>
+          </a:prstGeom>
+          <a:solidFill>
+            <a:srgbClr val="EA851B"/>
+          </a:solidFill>
+          <a:ln>
+            <a:noFill/>
+          </a:ln>
+        </p:spPr>
+        <p:style>
+          <a:lnRef idx="1">
+            <a:schemeClr val="accent1"/>
+          </a:lnRef>
+          <a:fillRef idx="3">
+            <a:schemeClr val="accent1"/>
+          </a:fillRef>
+          <a:effectRef idx="2">
+            <a:schemeClr val="accent1"/>
+          </a:effectRef>
+          <a:fontRef idx="minor">
+            <a:schemeClr val="lt1"/>
+          </a:fontRef>
+        </p:style>
+        <p:txBody>
+          <a:bodyPr rtlCol="0" anchor="ctr"/>
+          <a:lstStyle/>
+          <a:p>
+            <a:pPr algn="ctr"/>
+          </a:p>
+        </p:txBody>
+      </p:sp>
+      <p:sp>
+        <p:nvSpPr>
+          <p:cNvPr id="4" name="TextBox 3"/>
+          <p:cNvSpPr txBox="1"/>
+          <p:nvPr/>
+        </p:nvSpPr>
+        <p:spPr>
+          <a:xfrm>
+            <a:off x="365760" y="6492240"/>
+            <a:ext cx="7315200" cy="274320"/>
+          </a:xfrm>
+          <a:prstGeom prst="rect">
+            <a:avLst/>
+          </a:prstGeom>
+          <a:noFill/>
+        </p:spPr>
+        <p:txBody>
+          <a:bodyPr wrap="square" lIns="45720" rIns="45720">
+            <a:spAutoFit/>
+          </a:bodyPr>
+          <a:lstStyle/>
+          <a:p>
+            <a:pPr algn="l">
+              <a:lnSpc>
+                <a:spcPct val="115000"/>
+              </a:lnSpc>
+            </a:pPr>
+            <a:r>
+              <a:rPr sz="1000" b="0">
+                <a:solidFill>
+                  <a:srgbClr val="7A7A7A"/>
+                </a:solidFill>
+                <a:latin typeface="Pretendard Medium"/>
+              </a:rPr>
+              <a:t>Week 3</a:t>
+            </a:r>
+          </a:p>
+        </p:txBody>
+      </p:sp>
+      <p:sp>
+        <p:nvSpPr>
+          <p:cNvPr id="5" name="TextBox 4"/>
+          <p:cNvSpPr txBox="1"/>
+          <p:nvPr/>
+        </p:nvSpPr>
+        <p:spPr>
+          <a:xfrm>
+            <a:off x="11155680" y="6492240"/>
+            <a:ext cx="914400" cy="274320"/>
+          </a:xfrm>
+          <a:prstGeom prst="rect">
+            <a:avLst/>
+          </a:prstGeom>
+          <a:noFill/>
+        </p:spPr>
+        <p:txBody>
+          <a:bodyPr wrap="square" lIns="45720" rIns="45720">
+            <a:spAutoFit/>
+          </a:bodyPr>
+          <a:lstStyle/>
+          <a:p>
+            <a:pPr algn="r">
+              <a:lnSpc>
+                <a:spcPct val="115000"/>
+              </a:lnSpc>
+            </a:pPr>
+            <a:r>
+              <a:rPr sz="1000" b="0">
+                <a:solidFill>
+                  <a:srgbClr val="7A7A7A"/>
+                </a:solidFill>
+                <a:latin typeface="Pretendard Medium"/>
+              </a:rPr>
+              <a:t>15 / 17</a:t>
+            </a:r>
+          </a:p>
+        </p:txBody>
+      </p:sp>
+      <p:pic>
+        <p:nvPicPr>
+          <p:cNvPr id="6" name="Picture 5" descr="W3_lbm_permeability.png"/>
+          <p:cNvPicPr>
+            <a:picLocks noChangeAspect="1"/>
+          </p:cNvPicPr>
+          <p:nvPr/>
+        </p:nvPicPr>
+        <p:blipFill>
+          <a:blip r:embed="rId2"/>
+          <a:stretch>
+            <a:fillRect/>
+          </a:stretch>
+        </p:blipFill>
+        <p:spPr>
+          <a:xfrm>
+            <a:off x="640080" y="1371600"/>
+            <a:ext cx="10881360" cy="4551483"/>
+          </a:xfrm>
+          <a:prstGeom prst="rect">
+            <a:avLst/>
+          </a:prstGeom>
+        </p:spPr>
+      </p:pic>
+      <p:sp>
+        <p:nvSpPr>
+          <p:cNvPr id="7" name="TextBox 6"/>
+          <p:cNvSpPr txBox="1"/>
+          <p:nvPr/>
+        </p:nvSpPr>
+        <p:spPr>
+          <a:xfrm>
+            <a:off x="640080" y="5943600"/>
+            <a:ext cx="10881360" cy="457200"/>
+          </a:xfrm>
+          <a:prstGeom prst="rect">
+            <a:avLst/>
+          </a:prstGeom>
+          <a:noFill/>
+        </p:spPr>
+        <p:txBody>
+          <a:bodyPr wrap="square" lIns="45720" rIns="45720">
+            <a:spAutoFit/>
+          </a:bodyPr>
+          <a:lstStyle/>
+          <a:p>
+            <a:pPr algn="l">
+              <a:lnSpc>
+                <a:spcPct val="115000"/>
+              </a:lnSpc>
+            </a:pPr>
+            <a:r>
+              <a:rPr sz="1300" b="0">
+                <a:solidFill>
+                  <a:srgbClr val="7A7A7A"/>
+                </a:solidFill>
+                <a:latin typeface="Pretendard SemiBold"/>
+              </a:rPr>
+              <a:t>8도메인 평균: 선형 14.2% → UNet+GAN 6.3% 오차. 세 축 통합(W5)까지 더하면 1.3%.</a:t>
+            </a:r>
+          </a:p>
+        </p:txBody>
+      </p:sp>
+    </p:spTree>
+  </p:cSld>
+  <p:clrMapOvr>
+    <a:masterClrMapping/>
+  </p:clrMapOvr>
+</p:sld>
+</file>
+
+<file path=ppt/slides/slide16.xml><?xml version="1.0" encoding="utf-8"?>
+<p:sld xmlns:a="http://schemas.openxmlformats.org/drawingml/2006/main" xmlns:p="http://schemas.openxmlformats.org/presentationml/2006/main" xmlns:r="http://schemas.openxmlformats.org/officeDocument/2006/relationships">
+  <p:cSld>
+    <p:spTree>
+      <p:nvGrpSpPr>
+        <p:cNvPr id="1" name=""/>
+        <p:cNvGrpSpPr/>
+        <p:nvPr/>
+      </p:nvGrpSpPr>
+      <p:grpSpPr/>
+      <p:sp>
+        <p:nvSpPr>
+          <p:cNvPr id="2" name="TextBox 1"/>
+          <p:cNvSpPr txBox="1"/>
+          <p:nvPr/>
+        </p:nvSpPr>
+        <p:spPr>
+          <a:xfrm>
+            <a:off x="457200" y="320040"/>
+            <a:ext cx="11430000" cy="640080"/>
+          </a:xfrm>
+          <a:prstGeom prst="rect">
+            <a:avLst/>
+          </a:prstGeom>
+          <a:noFill/>
+        </p:spPr>
+        <p:txBody>
+          <a:bodyPr wrap="square" lIns="45720" rIns="45720">
+            <a:spAutoFit/>
+          </a:bodyPr>
+          <a:lstStyle/>
+          <a:p>
+            <a:pPr algn="l">
+              <a:lnSpc>
+                <a:spcPct val="115000"/>
+              </a:lnSpc>
+            </a:pPr>
+            <a:r>
+              <a:rPr sz="2800" b="0">
+                <a:solidFill>
+                  <a:srgbClr val="EA851B"/>
+                </a:solidFill>
+                <a:latin typeface="Pretendard Black"/>
+              </a:rPr>
+              <a:t>평가의 교훈 — 지표의 사다리</a:t>
+            </a:r>
+          </a:p>
+        </p:txBody>
+      </p:sp>
+      <p:sp>
+        <p:nvSpPr>
+          <p:cNvPr id="3" name="Rectangle 2"/>
+          <p:cNvSpPr/>
+          <p:nvPr/>
+        </p:nvSpPr>
+        <p:spPr>
+          <a:xfrm>
+            <a:off x="502920" y="960120"/>
+            <a:ext cx="1097280" cy="54864"/>
+          </a:xfrm>
+          <a:prstGeom prst="rect">
+            <a:avLst/>
+          </a:prstGeom>
+          <a:solidFill>
+            <a:srgbClr val="EA851B"/>
+          </a:solidFill>
+          <a:ln>
+            <a:noFill/>
+          </a:ln>
+        </p:spPr>
+        <p:style>
+          <a:lnRef idx="1">
+            <a:schemeClr val="accent1"/>
+          </a:lnRef>
+          <a:fillRef idx="3">
+            <a:schemeClr val="accent1"/>
+          </a:fillRef>
+          <a:effectRef idx="2">
+            <a:schemeClr val="accent1"/>
+          </a:effectRef>
+          <a:fontRef idx="minor">
+            <a:schemeClr val="lt1"/>
+          </a:fontRef>
+        </p:style>
+        <p:txBody>
+          <a:bodyPr rtlCol="0" anchor="ctr"/>
+          <a:lstStyle/>
+          <a:p>
+            <a:pPr algn="ctr"/>
+          </a:p>
+        </p:txBody>
+      </p:sp>
+      <p:sp>
+        <p:nvSpPr>
+          <p:cNvPr id="4" name="TextBox 3"/>
+          <p:cNvSpPr txBox="1"/>
+          <p:nvPr/>
+        </p:nvSpPr>
+        <p:spPr>
+          <a:xfrm>
+            <a:off x="365760" y="6492240"/>
+            <a:ext cx="7315200" cy="274320"/>
+          </a:xfrm>
+          <a:prstGeom prst="rect">
+            <a:avLst/>
+          </a:prstGeom>
+          <a:noFill/>
+        </p:spPr>
+        <p:txBody>
+          <a:bodyPr wrap="square" lIns="45720" rIns="45720">
+            <a:spAutoFit/>
+          </a:bodyPr>
+          <a:lstStyle/>
+          <a:p>
+            <a:pPr algn="l">
+              <a:lnSpc>
+                <a:spcPct val="115000"/>
+              </a:lnSpc>
+            </a:pPr>
+            <a:r>
+              <a:rPr sz="1000" b="0">
+                <a:solidFill>
+                  <a:srgbClr val="7A7A7A"/>
+                </a:solidFill>
+                <a:latin typeface="Pretendard Medium"/>
+              </a:rPr>
+              <a:t>Week 3</a:t>
+            </a:r>
+          </a:p>
+        </p:txBody>
+      </p:sp>
+      <p:sp>
+        <p:nvSpPr>
+          <p:cNvPr id="5" name="TextBox 4"/>
+          <p:cNvSpPr txBox="1"/>
+          <p:nvPr/>
+        </p:nvSpPr>
+        <p:spPr>
+          <a:xfrm>
+            <a:off x="11155680" y="6492240"/>
+            <a:ext cx="914400" cy="274320"/>
+          </a:xfrm>
+          <a:prstGeom prst="rect">
+            <a:avLst/>
+          </a:prstGeom>
+          <a:noFill/>
+        </p:spPr>
+        <p:txBody>
+          <a:bodyPr wrap="square" lIns="45720" rIns="45720">
+            <a:spAutoFit/>
+          </a:bodyPr>
+          <a:lstStyle/>
+          <a:p>
+            <a:pPr algn="r">
+              <a:lnSpc>
+                <a:spcPct val="115000"/>
+              </a:lnSpc>
+            </a:pPr>
+            <a:r>
+              <a:rPr sz="1000" b="0">
+                <a:solidFill>
+                  <a:srgbClr val="7A7A7A"/>
+                </a:solidFill>
+                <a:latin typeface="Pretendard Medium"/>
+              </a:rPr>
+              <a:t>16 / 17</a:t>
+            </a:r>
+          </a:p>
+        </p:txBody>
+      </p:sp>
+      <p:sp>
+        <p:nvSpPr>
+          <p:cNvPr id="6" name="TextBox 5"/>
+          <p:cNvSpPr txBox="1"/>
+          <p:nvPr/>
+        </p:nvSpPr>
+        <p:spPr>
+          <a:xfrm>
+            <a:off x="731520" y="1645920"/>
+            <a:ext cx="10972800" cy="3291840"/>
+          </a:xfrm>
+          <a:prstGeom prst="rect">
+            <a:avLst/>
+          </a:prstGeom>
+          <a:noFill/>
+        </p:spPr>
+        <p:txBody>
+          <a:bodyPr wrap="square">
+            <a:spAutoFit/>
+          </a:bodyPr>
+          <a:lstStyle/>
           <a:p>
             <a:pPr>
               <a:lnSpc>
@@ -5239,7 +5407,7 @@
                 </a:solidFill>
                 <a:latin typeface="Pretendard SemiBold"/>
               </a:rPr>
-              <a:t>과제 3·4(선택) 안정화 실험 · "숫자는 비슷, 구조는 다름" 사례</a:t>
+              <a:t>1단 공극률 |Δφ| — 부피 비율. 배치·연결은 못 봄 (GAN 이득: 있음)</a:t>
             </a:r>
           </a:p>
           <a:p>
@@ -5267,7 +5435,404 @@
                 </a:solidFill>
                 <a:latin typeface="Pretendard SemiBold"/>
               </a:rPr>
-              <a:t>다음 주 W4 — 다른 아키텍처 (Transformer · 3D). GAN 체크포인트 보존.</a:t>
+              <a:t>2단 S2 상관 — 구조의 통계. 배치가 다르면 갈림 (GAN 이득: 최근접)</a:t>
+            </a:r>
+          </a:p>
+          <a:p>
+            <a:pPr>
+              <a:lnSpc>
+                <a:spcPct val="130000"/>
+              </a:lnSpc>
+              <a:spcAft>
+                <a:spcPts val="600"/>
+              </a:spcAft>
+            </a:pPr>
+            <a:r>
+              <a:rPr sz="1800" b="0">
+                <a:solidFill>
+                  <a:srgbClr val="EA851B"/>
+                </a:solidFill>
+                <a:latin typeface="Pretendard ExtraBold"/>
+              </a:rPr>
+              <a:t>•  </a:t>
+            </a:r>
+            <a:r>
+              <a:rPr sz="1800" b="0">
+                <a:solidFill>
+                  <a:srgbClr val="181818"/>
+                </a:solidFill>
+                <a:latin typeface="Pretendard SemiBold"/>
+              </a:rPr>
+              <a:t>3단 투과율 — 흐름의 물리. 연결성이 전부 (GAN 이득: 가장 뚜렷, 14.2→6.3%)</a:t>
+            </a:r>
+          </a:p>
+          <a:p>
+            <a:pPr>
+              <a:lnSpc>
+                <a:spcPct val="130000"/>
+              </a:lnSpc>
+              <a:spcAft>
+                <a:spcPts val="600"/>
+              </a:spcAft>
+            </a:pPr>
+            <a:r>
+              <a:rPr sz="1800" b="0">
+                <a:solidFill>
+                  <a:srgbClr val="EA851B"/>
+                </a:solidFill>
+                <a:latin typeface="Pretendard ExtraBold"/>
+              </a:rPr>
+              <a:t>•  </a:t>
+            </a:r>
+            <a:r>
+              <a:rPr sz="1800" b="0">
+                <a:solidFill>
+                  <a:srgbClr val="181818"/>
+                </a:solidFill>
+                <a:latin typeface="Pretendard SemiBold"/>
+              </a:rPr>
+              <a:t>복원 품질은 숫자 하나로 판단하지 않는다 — 용도가 요구하는 지표까지 올라가 검증</a:t>
+            </a:r>
+          </a:p>
+        </p:txBody>
+      </p:sp>
+    </p:spTree>
+  </p:cSld>
+  <p:clrMapOvr>
+    <a:masterClrMapping/>
+  </p:clrMapOvr>
+</p:sld>
+</file>
+
+<file path=ppt/slides/slide17.xml><?xml version="1.0" encoding="utf-8"?>
+<p:sld xmlns:a="http://schemas.openxmlformats.org/drawingml/2006/main" xmlns:p="http://schemas.openxmlformats.org/presentationml/2006/main" xmlns:r="http://schemas.openxmlformats.org/officeDocument/2006/relationships">
+  <p:cSld>
+    <p:spTree>
+      <p:nvGrpSpPr>
+        <p:cNvPr id="1" name=""/>
+        <p:cNvGrpSpPr/>
+        <p:nvPr/>
+      </p:nvGrpSpPr>
+      <p:grpSpPr/>
+      <p:sp>
+        <p:nvSpPr>
+          <p:cNvPr id="2" name="TextBox 1"/>
+          <p:cNvSpPr txBox="1"/>
+          <p:nvPr/>
+        </p:nvSpPr>
+        <p:spPr>
+          <a:xfrm>
+            <a:off x="457200" y="320040"/>
+            <a:ext cx="11430000" cy="640080"/>
+          </a:xfrm>
+          <a:prstGeom prst="rect">
+            <a:avLst/>
+          </a:prstGeom>
+          <a:noFill/>
+        </p:spPr>
+        <p:txBody>
+          <a:bodyPr wrap="square" lIns="45720" rIns="45720">
+            <a:spAutoFit/>
+          </a:bodyPr>
+          <a:lstStyle/>
+          <a:p>
+            <a:pPr algn="l">
+              <a:lnSpc>
+                <a:spcPct val="115000"/>
+              </a:lnSpc>
+            </a:pPr>
+            <a:r>
+              <a:rPr sz="2800" b="0">
+                <a:solidFill>
+                  <a:srgbClr val="EA851B"/>
+                </a:solidFill>
+                <a:latin typeface="Pretendard Black"/>
+              </a:rPr>
+              <a:t>정리 · 실습 · 다음 주</a:t>
+            </a:r>
+          </a:p>
+        </p:txBody>
+      </p:sp>
+      <p:sp>
+        <p:nvSpPr>
+          <p:cNvPr id="3" name="Rectangle 2"/>
+          <p:cNvSpPr/>
+          <p:nvPr/>
+        </p:nvSpPr>
+        <p:spPr>
+          <a:xfrm>
+            <a:off x="502920" y="960120"/>
+            <a:ext cx="1097280" cy="54864"/>
+          </a:xfrm>
+          <a:prstGeom prst="rect">
+            <a:avLst/>
+          </a:prstGeom>
+          <a:solidFill>
+            <a:srgbClr val="EA851B"/>
+          </a:solidFill>
+          <a:ln>
+            <a:noFill/>
+          </a:ln>
+        </p:spPr>
+        <p:style>
+          <a:lnRef idx="1">
+            <a:schemeClr val="accent1"/>
+          </a:lnRef>
+          <a:fillRef idx="3">
+            <a:schemeClr val="accent1"/>
+          </a:fillRef>
+          <a:effectRef idx="2">
+            <a:schemeClr val="accent1"/>
+          </a:effectRef>
+          <a:fontRef idx="minor">
+            <a:schemeClr val="lt1"/>
+          </a:fontRef>
+        </p:style>
+        <p:txBody>
+          <a:bodyPr rtlCol="0" anchor="ctr"/>
+          <a:lstStyle/>
+          <a:p>
+            <a:pPr algn="ctr"/>
+          </a:p>
+        </p:txBody>
+      </p:sp>
+      <p:sp>
+        <p:nvSpPr>
+          <p:cNvPr id="4" name="TextBox 3"/>
+          <p:cNvSpPr txBox="1"/>
+          <p:nvPr/>
+        </p:nvSpPr>
+        <p:spPr>
+          <a:xfrm>
+            <a:off x="365760" y="6492240"/>
+            <a:ext cx="7315200" cy="274320"/>
+          </a:xfrm>
+          <a:prstGeom prst="rect">
+            <a:avLst/>
+          </a:prstGeom>
+          <a:noFill/>
+        </p:spPr>
+        <p:txBody>
+          <a:bodyPr wrap="square" lIns="45720" rIns="45720">
+            <a:spAutoFit/>
+          </a:bodyPr>
+          <a:lstStyle/>
+          <a:p>
+            <a:pPr algn="l">
+              <a:lnSpc>
+                <a:spcPct val="115000"/>
+              </a:lnSpc>
+            </a:pPr>
+            <a:r>
+              <a:rPr sz="1000" b="0">
+                <a:solidFill>
+                  <a:srgbClr val="7A7A7A"/>
+                </a:solidFill>
+                <a:latin typeface="Pretendard Medium"/>
+              </a:rPr>
+              <a:t>Week 3</a:t>
+            </a:r>
+          </a:p>
+        </p:txBody>
+      </p:sp>
+      <p:sp>
+        <p:nvSpPr>
+          <p:cNvPr id="5" name="TextBox 4"/>
+          <p:cNvSpPr txBox="1"/>
+          <p:nvPr/>
+        </p:nvSpPr>
+        <p:spPr>
+          <a:xfrm>
+            <a:off x="11155680" y="6492240"/>
+            <a:ext cx="914400" cy="274320"/>
+          </a:xfrm>
+          <a:prstGeom prst="rect">
+            <a:avLst/>
+          </a:prstGeom>
+          <a:noFill/>
+        </p:spPr>
+        <p:txBody>
+          <a:bodyPr wrap="square" lIns="45720" rIns="45720">
+            <a:spAutoFit/>
+          </a:bodyPr>
+          <a:lstStyle/>
+          <a:p>
+            <a:pPr algn="r">
+              <a:lnSpc>
+                <a:spcPct val="115000"/>
+              </a:lnSpc>
+            </a:pPr>
+            <a:r>
+              <a:rPr sz="1000" b="0">
+                <a:solidFill>
+                  <a:srgbClr val="7A7A7A"/>
+                </a:solidFill>
+                <a:latin typeface="Pretendard Medium"/>
+              </a:rPr>
+              <a:t>17 / 17</a:t>
+            </a:r>
+          </a:p>
+        </p:txBody>
+      </p:sp>
+      <p:sp>
+        <p:nvSpPr>
+          <p:cNvPr id="6" name="TextBox 5"/>
+          <p:cNvSpPr txBox="1"/>
+          <p:nvPr/>
+        </p:nvSpPr>
+        <p:spPr>
+          <a:xfrm>
+            <a:off x="731520" y="1554480"/>
+            <a:ext cx="10972800" cy="4023360"/>
+          </a:xfrm>
+          <a:prstGeom prst="rect">
+            <a:avLst/>
+          </a:prstGeom>
+          <a:noFill/>
+        </p:spPr>
+        <p:txBody>
+          <a:bodyPr wrap="square">
+            <a:spAutoFit/>
+          </a:bodyPr>
+          <a:lstStyle/>
+          <a:p>
+            <a:pPr>
+              <a:lnSpc>
+                <a:spcPct val="130000"/>
+              </a:lnSpc>
+              <a:spcAft>
+                <a:spcPts val="600"/>
+              </a:spcAft>
+            </a:pPr>
+            <a:r>
+              <a:rPr sz="1700" b="0">
+                <a:solidFill>
+                  <a:srgbClr val="EA851B"/>
+                </a:solidFill>
+                <a:latin typeface="Pretendard ExtraBold"/>
+              </a:rPr>
+              <a:t>•  </a:t>
+            </a:r>
+            <a:r>
+              <a:rPr sz="1700" b="0">
+                <a:solidFill>
+                  <a:srgbClr val="181818"/>
+                </a:solidFill>
+                <a:latin typeface="Pretendard SemiBold"/>
+              </a:rPr>
+              <a:t>흐림은 픽셀 손실의 수학적 귀결 → 판별자와의 경쟁이 "회색 벌점"을 만든다</a:t>
+            </a:r>
+          </a:p>
+          <a:p>
+            <a:pPr>
+              <a:lnSpc>
+                <a:spcPct val="130000"/>
+              </a:lnSpc>
+              <a:spcAft>
+                <a:spcPts val="600"/>
+              </a:spcAft>
+            </a:pPr>
+            <a:r>
+              <a:rPr sz="1700" b="0">
+                <a:solidFill>
+                  <a:srgbClr val="EA851B"/>
+                </a:solidFill>
+                <a:latin typeface="Pretendard ExtraBold"/>
+              </a:rPr>
+              <a:t>•  </a:t>
+            </a:r>
+            <a:r>
+              <a:rPr sz="1700" b="0">
+                <a:solidFill>
+                  <a:srgbClr val="181818"/>
+                </a:solidFill>
+                <a:latin typeface="Pretendard SemiBold"/>
+              </a:rPr>
+              <a:t>실습: train_gan( ) 한 함수, 두 경로 — 처음부터 / W2 체크포인트 이어받기</a:t>
+            </a:r>
+          </a:p>
+          <a:p>
+            <a:pPr>
+              <a:lnSpc>
+                <a:spcPct val="130000"/>
+              </a:lnSpc>
+              <a:spcAft>
+                <a:spcPts val="600"/>
+              </a:spcAft>
+            </a:pPr>
+            <a:r>
+              <a:rPr sz="1700" b="0">
+                <a:solidFill>
+                  <a:srgbClr val="EA851B"/>
+                </a:solidFill>
+                <a:latin typeface="Pretendard ExtraBold"/>
+              </a:rPr>
+              <a:t>•  </a:t>
+            </a:r>
+            <a:r>
+              <a:rPr sz="1700" b="0">
+                <a:solidFill>
+                  <a:srgbClr val="181818"/>
+                </a:solidFill>
+                <a:latin typeface="Pretendard SemiBold"/>
+              </a:rPr>
+              <a:t>과제(필수): ① GAN 유무 비교 서술  ② λ sweep — 선명도 ↔ |Δφ| 곡선</a:t>
+            </a:r>
+          </a:p>
+          <a:p>
+            <a:pPr>
+              <a:lnSpc>
+                <a:spcPct val="130000"/>
+              </a:lnSpc>
+              <a:spcAft>
+                <a:spcPts val="600"/>
+              </a:spcAft>
+            </a:pPr>
+            <a:r>
+              <a:rPr sz="1700" b="0">
+                <a:solidFill>
+                  <a:srgbClr val="EA851B"/>
+                </a:solidFill>
+                <a:latin typeface="Pretendard ExtraBold"/>
+              </a:rPr>
+              <a:t>•  </a:t>
+            </a:r>
+            <a:r>
+              <a:rPr sz="1700" b="0">
+                <a:solidFill>
+                  <a:srgbClr val="181818"/>
+                </a:solidFill>
+                <a:latin typeface="Pretendard SemiBold"/>
+              </a:rPr>
+              <a:t>과제(선택): ③ warmup·spectral norm 안정성 실험  ④ "숫자는 비슷, 구조는 다른" 사례</a:t>
+            </a:r>
+          </a:p>
+          <a:p>
+            <a:pPr>
+              <a:lnSpc>
+                <a:spcPct val="130000"/>
+              </a:lnSpc>
+              <a:spcAft>
+                <a:spcPts val="600"/>
+              </a:spcAft>
+            </a:pPr>
+            <a:r>
+              <a:rPr sz="1700" b="0">
+                <a:solidFill>
+                  <a:srgbClr val="EA851B"/>
+                </a:solidFill>
+                <a:latin typeface="Pretendard ExtraBold"/>
+              </a:rPr>
+              <a:t>•  </a:t>
+            </a:r>
+            <a:r>
+              <a:rPr sz="1700" b="0">
+                <a:solidFill>
+                  <a:srgbClr val="181818"/>
+                </a:solidFill>
+                <a:latin typeface="Pretendard SemiBold"/>
+              </a:rPr>
+              <a:t>다음 주 W4: Transformer · 3D 아키텍처와 정면 비교 — 체크포인트 보존!</a:t>
             </a:r>
           </a:p>
         </p:txBody>
@@ -5292,20 +5857,59 @@
       <p:grpSpPr/>
       <p:sp>
         <p:nvSpPr>
-          <p:cNvPr id="2" name="Rectangle 1"/>
+          <p:cNvPr id="2" name="TextBox 1"/>
+          <p:cNvSpPr txBox="1"/>
+          <p:nvPr/>
+        </p:nvSpPr>
+        <p:spPr>
+          <a:xfrm>
+            <a:off x="457200" y="320040"/>
+            <a:ext cx="11430000" cy="640080"/>
+          </a:xfrm>
+          <a:prstGeom prst="rect">
+            <a:avLst/>
+          </a:prstGeom>
+          <a:noFill/>
+        </p:spPr>
+        <p:txBody>
+          <a:bodyPr wrap="square" lIns="45720" rIns="45720">
+            <a:spAutoFit/>
+          </a:bodyPr>
+          <a:lstStyle/>
+          <a:p>
+            <a:pPr algn="l">
+              <a:lnSpc>
+                <a:spcPct val="115000"/>
+              </a:lnSpc>
+            </a:pPr>
+            <a:r>
+              <a:rPr sz="2800" b="0">
+                <a:solidFill>
+                  <a:srgbClr val="EA851B"/>
+                </a:solidFill>
+                <a:latin typeface="Pretendard Black"/>
+              </a:rPr>
+              <a:t>여기까지 왔습니다 — 그리고 하나가 남았습니다</a:t>
+            </a:r>
+          </a:p>
+        </p:txBody>
+      </p:sp>
+      <p:sp>
+        <p:nvSpPr>
+          <p:cNvPr id="3" name="Rectangle 2"/>
           <p:cNvSpPr/>
           <p:nvPr/>
         </p:nvSpPr>
         <p:spPr>
           <a:xfrm>
-            <a:off x="0" y="0"/>
-            <a:ext cx="12191695" cy="6858000"/>
+            <a:off x="502920" y="960120"/>
+            <a:ext cx="1097280" cy="54864"/>
           </a:xfrm>
           <a:prstGeom prst="rect">
             <a:avLst/>
           </a:prstGeom>
           <a:solidFill>
-            <a:srgbClr val="FAF5EE"/>
+            <a:srgbClr val="EA851B"/>
           </a:solidFill>
           <a:ln>
             <a:noFill/>
@@ -5328,19 +5932,21 @@
         <p:txBody>
           <a:bodyPr rtlCol="0" anchor="ctr"/>
           <a:lstStyle/>
-          <a:p/>
-        </p:txBody>
-      </p:sp>
-      <p:sp>
-        <p:nvSpPr>
-          <p:cNvPr id="3" name="TextBox 2"/>
+          <a:p>
+            <a:pPr algn="ctr"/>
+          </a:p>
+        </p:txBody>
+      </p:sp>
+      <p:sp>
+        <p:nvSpPr>
+          <p:cNvPr id="4" name="TextBox 3"/>
           <p:cNvSpPr txBox="1"/>
           <p:nvPr/>
         </p:nvSpPr>
         <p:spPr>
           <a:xfrm>
-            <a:off x="731520" y="2286000"/>
-            <a:ext cx="10058400" cy="548640"/>
+            <a:off x="365760" y="6492240"/>
+            <a:ext cx="7315200" cy="274320"/>
           </a:xfrm>
           <a:prstGeom prst="rect">
             <a:avLst/>
@@ -5359,27 +5965,27 @@
               </a:lnSpc>
             </a:pPr>
             <a:r>
-              <a:rPr sz="2000" b="0">
-                <a:solidFill>
-                  <a:srgbClr val="EA851B"/>
-                </a:solidFill>
-                <a:latin typeface="Pretendard ExtraBold"/>
-              </a:rPr>
-              <a:t>Section 1</a:t>
-            </a:r>
-          </a:p>
-        </p:txBody>
-      </p:sp>
-      <p:sp>
-        <p:nvSpPr>
-          <p:cNvPr id="4" name="TextBox 3"/>
+              <a:rPr sz="1000" b="0">
+                <a:solidFill>
+                  <a:srgbClr val="7A7A7A"/>
+                </a:solidFill>
+                <a:latin typeface="Pretendard Medium"/>
+              </a:rPr>
+              <a:t>Week 3</a:t>
+            </a:r>
+          </a:p>
+        </p:txBody>
+      </p:sp>
+      <p:sp>
+        <p:nvSpPr>
+          <p:cNvPr id="5" name="TextBox 4"/>
           <p:cNvSpPr txBox="1"/>
           <p:nvPr/>
         </p:nvSpPr>
         <p:spPr>
           <a:xfrm>
-            <a:off x="731520" y="2834640"/>
-            <a:ext cx="10058400" cy="1371600"/>
+            <a:off x="11155680" y="6492240"/>
+            <a:ext cx="914400" cy="274320"/>
           </a:xfrm>
           <a:prstGeom prst="rect">
             <a:avLst/>
@@ -5392,33 +5998,33 @@
           </a:bodyPr>
           <a:lstStyle/>
           <a:p>
-            <a:pPr algn="l">
+            <a:pPr algn="r">
               <a:lnSpc>
                 <a:spcPct val="115000"/>
               </a:lnSpc>
             </a:pPr>
             <a:r>
-              <a:rPr sz="4400" b="0">
-                <a:solidFill>
-                  <a:srgbClr val="181818"/>
-                </a:solidFill>
-                <a:latin typeface="Pretendard Black"/>
-              </a:rPr>
-              <a:t>문제 — L1은 왜 뿌옇나</a:t>
-            </a:r>
-          </a:p>
-        </p:txBody>
-      </p:sp>
-      <p:sp>
-        <p:nvSpPr>
-          <p:cNvPr id="5" name="TextBox 4"/>
+              <a:rPr sz="1000" b="0">
+                <a:solidFill>
+                  <a:srgbClr val="7A7A7A"/>
+                </a:solidFill>
+                <a:latin typeface="Pretendard Medium"/>
+              </a:rPr>
+              <a:t>2 / 17</a:t>
+            </a:r>
+          </a:p>
+        </p:txBody>
+      </p:sp>
+      <p:sp>
+        <p:nvSpPr>
+          <p:cNvPr id="6" name="TextBox 5"/>
           <p:cNvSpPr txBox="1"/>
           <p:nvPr/>
         </p:nvSpPr>
         <p:spPr>
           <a:xfrm>
-            <a:off x="365760" y="6492240"/>
-            <a:ext cx="7315200" cy="274320"/>
+            <a:off x="548640" y="1371600"/>
+            <a:ext cx="5486400" cy="457200"/>
           </a:xfrm>
           <a:prstGeom prst="rect">
             <a:avLst/>
@@ -5437,27 +6043,134 @@
               </a:lnSpc>
             </a:pPr>
             <a:r>
-              <a:rPr sz="1000" b="0">
-                <a:solidFill>
-                  <a:srgbClr val="7A7A7A"/>
-                </a:solidFill>
-                <a:latin typeface="Pretendard Medium"/>
-              </a:rPr>
-              <a:t>Week 3</a:t>
-            </a:r>
-          </a:p>
-        </p:txBody>
-      </p:sp>
-      <p:sp>
-        <p:nvSpPr>
-          <p:cNvPr id="6" name="TextBox 5"/>
+              <a:rPr sz="2200" b="0">
+                <a:solidFill>
+                  <a:srgbClr val="EA851B"/>
+                </a:solidFill>
+                <a:latin typeface="Pretendard Black"/>
+              </a:rPr>
+              <a:t>W1 → W2 성과</a:t>
+            </a:r>
+          </a:p>
+        </p:txBody>
+      </p:sp>
+      <p:sp>
+        <p:nvSpPr>
+          <p:cNvPr id="7" name="TextBox 6"/>
           <p:cNvSpPr txBox="1"/>
           <p:nvPr/>
         </p:nvSpPr>
         <p:spPr>
           <a:xfrm>
-            <a:off x="11155680" y="6492240"/>
-            <a:ext cx="914400" cy="274320"/>
+            <a:off x="548640" y="1920240"/>
+            <a:ext cx="5486400" cy="4572000"/>
+          </a:xfrm>
+          <a:prstGeom prst="rect">
+            <a:avLst/>
+          </a:prstGeom>
+          <a:noFill/>
+        </p:spPr>
+        <p:txBody>
+          <a:bodyPr wrap="square">
+            <a:spAutoFit/>
+          </a:bodyPr>
+          <a:lstStyle/>
+          <a:p>
+            <a:pPr>
+              <a:lnSpc>
+                <a:spcPct val="130000"/>
+              </a:lnSpc>
+              <a:spcAft>
+                <a:spcPts val="600"/>
+              </a:spcAft>
+            </a:pPr>
+            <a:r>
+              <a:rPr sz="1600" b="0">
+                <a:solidFill>
+                  <a:srgbClr val="EA851B"/>
+                </a:solidFill>
+                <a:latin typeface="Pretendard ExtraBold"/>
+              </a:rPr>
+              <a:t>•  </a:t>
+            </a:r>
+            <a:r>
+              <a:rPr sz="1600" b="0">
+                <a:solidFill>
+                  <a:srgbClr val="181818"/>
+                </a:solidFill>
+                <a:latin typeface="Pretendard SemiBold"/>
+              </a:rPr>
+              <a:t>선형 보간 |Δφ| 6.87%p (k=1)</a:t>
+            </a:r>
+          </a:p>
+          <a:p>
+            <a:pPr>
+              <a:lnSpc>
+                <a:spcPct val="130000"/>
+              </a:lnSpc>
+              <a:spcAft>
+                <a:spcPts val="600"/>
+              </a:spcAft>
+            </a:pPr>
+            <a:r>
+              <a:rPr sz="1600" b="0">
+                <a:solidFill>
+                  <a:srgbClr val="EA851B"/>
+                </a:solidFill>
+                <a:latin typeface="Pretendard ExtraBold"/>
+              </a:rPr>
+              <a:t>•  </a:t>
+            </a:r>
+            <a:r>
+              <a:rPr sz="1600" b="0">
+                <a:solidFill>
+                  <a:srgbClr val="181818"/>
+                </a:solidFill>
+                <a:latin typeface="Pretendard SemiBold"/>
+              </a:rPr>
+              <a:t>mini UNet + L1: 0.47%p — 14배 개선</a:t>
+            </a:r>
+          </a:p>
+          <a:p>
+            <a:pPr>
+              <a:lnSpc>
+                <a:spcPct val="130000"/>
+              </a:lnSpc>
+              <a:spcAft>
+                <a:spcPts val="600"/>
+              </a:spcAft>
+            </a:pPr>
+            <a:r>
+              <a:rPr sz="1600" b="0">
+                <a:solidFill>
+                  <a:srgbClr val="EA851B"/>
+                </a:solidFill>
+                <a:latin typeface="Pretendard ExtraBold"/>
+              </a:rPr>
+              <a:t>•  </a:t>
+            </a:r>
+            <a:r>
+              <a:rPr sz="1600" b="0">
+                <a:solidFill>
+                  <a:srgbClr val="181818"/>
+                </a:solidFill>
+                <a:latin typeface="Pretendard SemiBold"/>
+              </a:rPr>
+              <a:t>pore 기하를 데이터에서 학습</a:t>
+            </a:r>
+          </a:p>
+        </p:txBody>
+      </p:sp>
+      <p:sp>
+        <p:nvSpPr>
+          <p:cNvPr id="8" name="TextBox 7"/>
+          <p:cNvSpPr txBox="1"/>
+          <p:nvPr/>
+        </p:nvSpPr>
+        <p:spPr>
+          <a:xfrm>
+            <a:off x="6400800" y="1371600"/>
+            <a:ext cx="5486400" cy="457200"/>
           </a:xfrm>
           <a:prstGeom prst="rect">
             <a:avLst/>
@@ -5470,19 +6183,165 @@
           </a:bodyPr>
           <a:lstStyle/>
           <a:p>
-            <a:pPr algn="r">
+            <a:pPr algn="l">
               <a:lnSpc>
                 <a:spcPct val="115000"/>
               </a:lnSpc>
             </a:pPr>
             <a:r>
-              <a:rPr sz="1000" b="0">
-                <a:solidFill>
-                  <a:srgbClr val="7A7A7A"/>
-                </a:solidFill>
-                <a:latin typeface="Pretendard Medium"/>
-              </a:rPr>
-              <a:t>2 / 14</a:t>
+              <a:rPr sz="2200" b="0">
+                <a:solidFill>
+                  <a:srgbClr val="EA851B"/>
+                </a:solidFill>
+                <a:latin typeface="Pretendard Black"/>
+              </a:rPr>
+              <a:t>남은 문제</a:t>
+            </a:r>
+          </a:p>
+        </p:txBody>
+      </p:sp>
+      <p:sp>
+        <p:nvSpPr>
+          <p:cNvPr id="9" name="TextBox 8"/>
+          <p:cNvSpPr txBox="1"/>
+          <p:nvPr/>
+        </p:nvSpPr>
+        <p:spPr>
+          <a:xfrm>
+            <a:off x="6400800" y="1920240"/>
+            <a:ext cx="5486400" cy="4572000"/>
+          </a:xfrm>
+          <a:prstGeom prst="rect">
+            <a:avLst/>
+          </a:prstGeom>
+          <a:noFill/>
+        </p:spPr>
+        <p:txBody>
+          <a:bodyPr wrap="square">
+            <a:spAutoFit/>
+          </a:bodyPr>
+          <a:lstStyle/>
+          <a:p>
+            <a:pPr>
+              <a:lnSpc>
+                <a:spcPct val="130000"/>
+              </a:lnSpc>
+              <a:spcAft>
+                <a:spcPts val="600"/>
+              </a:spcAft>
+            </a:pPr>
+            <a:r>
+              <a:rPr sz="1600" b="0">
+                <a:solidFill>
+                  <a:srgbClr val="EA851B"/>
+                </a:solidFill>
+                <a:latin typeface="Pretendard ExtraBold"/>
+              </a:rPr>
+              <a:t>•  </a:t>
+            </a:r>
+            <a:r>
+              <a:rPr sz="1600" b="0">
+                <a:solidFill>
+                  <a:srgbClr val="181818"/>
+                </a:solidFill>
+                <a:latin typeface="Pretendard SemiBold"/>
+              </a:rPr>
+              <a:t>이진화 전 출력이 흐리다</a:t>
+            </a:r>
+          </a:p>
+          <a:p>
+            <a:pPr>
+              <a:lnSpc>
+                <a:spcPct val="130000"/>
+              </a:lnSpc>
+              <a:spcAft>
+                <a:spcPts val="600"/>
+              </a:spcAft>
+            </a:pPr>
+            <a:r>
+              <a:rPr sz="1600" b="0">
+                <a:solidFill>
+                  <a:srgbClr val="EA851B"/>
+                </a:solidFill>
+                <a:latin typeface="Pretendard ExtraBold"/>
+              </a:rPr>
+              <a:t>•  </a:t>
+            </a:r>
+            <a:r>
+              <a:rPr sz="1600" b="0">
+                <a:solidFill>
+                  <a:srgbClr val="181818"/>
+                </a:solidFill>
+                <a:latin typeface="Pretendard SemiBold"/>
+              </a:rPr>
+              <a:t>경계마다 0과 1 사이 회색</a:t>
+            </a:r>
+          </a:p>
+          <a:p>
+            <a:pPr>
+              <a:lnSpc>
+                <a:spcPct val="130000"/>
+              </a:lnSpc>
+              <a:spcAft>
+                <a:spcPts val="600"/>
+              </a:spcAft>
+            </a:pPr>
+            <a:r>
+              <a:rPr sz="1600" b="0">
+                <a:solidFill>
+                  <a:srgbClr val="EA851B"/>
+                </a:solidFill>
+                <a:latin typeface="Pretendard ExtraBold"/>
+              </a:rPr>
+              <a:t>•  </a:t>
+            </a:r>
+            <a:r>
+              <a:rPr sz="1600" b="0">
+                <a:solidFill>
+                  <a:srgbClr val="181818"/>
+                </a:solidFill>
+                <a:latin typeface="Pretendard SemiBold"/>
+              </a:rPr>
+              <a:t>진짜 암석에는 없는 값</a:t>
+            </a:r>
+          </a:p>
+        </p:txBody>
+      </p:sp>
+      <p:sp>
+        <p:nvSpPr>
+          <p:cNvPr id="10" name="TextBox 9"/>
+          <p:cNvSpPr txBox="1"/>
+          <p:nvPr/>
+        </p:nvSpPr>
+        <p:spPr>
+          <a:xfrm>
+            <a:off x="731520" y="5669280"/>
+            <a:ext cx="10972800" cy="548640"/>
+          </a:xfrm>
+          <a:prstGeom prst="rect">
+            <a:avLst/>
+          </a:prstGeom>
+          <a:noFill/>
+        </p:spPr>
+        <p:txBody>
+          <a:bodyPr wrap="square" lIns="45720" rIns="45720">
+            <a:spAutoFit/>
+          </a:bodyPr>
+          <a:lstStyle/>
+          <a:p>
+            <a:pPr algn="l">
+              <a:lnSpc>
+                <a:spcPct val="115000"/>
+              </a:lnSpc>
+            </a:pPr>
+            <a:r>
+              <a:rPr sz="1600" b="1">
+                <a:solidFill>
+                  <a:srgbClr val="EA851B"/>
+                </a:solidFill>
+                <a:latin typeface="Pretendard SemiBold"/>
+              </a:rPr>
+              <a:t>왜 회색이 생기고, 왜 문제이며, 어떻게 없애는가 — 오늘의 전부입니다.</a:t>
             </a:r>
           </a:p>
         </p:txBody>
@@ -5539,7 +6398,7 @@
                 </a:solidFill>
                 <a:latin typeface="Pretendard Black"/>
               </a:rPr>
-              <a:t>평균의 함정 — L1은 "평균"을 고른다</a:t>
+              <a:t>§1 픽셀 하나로 계산하는 흐림의 근원</a:t>
             </a:r>
           </a:p>
         </p:txBody>
@@ -5660,45 +6519,21 @@
                 </a:solidFill>
                 <a:latin typeface="Pretendard Medium"/>
               </a:rPr>
-              <a:t>3 / 14</a:t>
-            </a:r>
-          </a:p>
-        </p:txBody>
-      </p:sp>
-      <p:pic>
-        <p:nvPicPr>
-          <p:cNvPr id="6" name="Picture 5" descr="W3_average_trap.png"/>
-          <p:cNvPicPr>
-            <a:picLocks noChangeAspect="1"/>
-          </p:cNvPicPr>
-          <p:nvPr/>
-        </p:nvPicPr>
-        <p:blipFill>
-          <a:blip r:embed="rId2"/>
-          <a:stretch>
-            <a:fillRect/>
-          </a:stretch>
-        </p:blipFill>
-        <p:spPr>
-          <a:xfrm>
-            <a:off x="457200" y="1371600"/>
-            <a:ext cx="6766560" cy="2001609"/>
-          </a:xfrm>
-          <a:prstGeom prst="rect">
-            <a:avLst/>
-          </a:prstGeom>
-        </p:spPr>
-      </p:pic>
-      <p:sp>
-        <p:nvSpPr>
-          <p:cNvPr id="7" name="TextBox 6"/>
+              <a:t>3 / 17</a:t>
+            </a:r>
+          </a:p>
+        </p:txBody>
+      </p:sp>
+      <p:sp>
+        <p:nvSpPr>
+          <p:cNvPr id="6" name="TextBox 5"/>
           <p:cNvSpPr txBox="1"/>
           <p:nvPr/>
         </p:nvSpPr>
         <p:spPr>
           <a:xfrm>
-            <a:off x="7498079" y="1737360"/>
-            <a:ext cx="4206240" cy="4114800"/>
+            <a:off x="731520" y="1554480"/>
+            <a:ext cx="10789920" cy="2926080"/>
           </a:xfrm>
           <a:prstGeom prst="rect">
             <a:avLst/>
@@ -5720,7 +6555,7 @@
               </a:spcAft>
             </a:pPr>
             <a:r>
-              <a:rPr sz="1600" b="0">
+              <a:rPr sz="1800" b="0">
                 <a:solidFill>
                   <a:srgbClr val="EA851B"/>
                 </a:solidFill>
@@ -5729,13 +6564,13 @@
               <a:t>•  </a:t>
             </a:r>
             <a:r>
-              <a:rPr sz="1600" b="0">
+              <a:rPr sz="1800" b="0">
                 <a:solidFill>
                   <a:srgbClr val="181818"/>
                 </a:solidFill>
                 <a:latin typeface="Pretendard SemiBold"/>
               </a:rPr>
-              <a:t>정답이 여럿일 때(A일 수도 B일 수도) L1 최적해 = 픽셀별 평균</a:t>
+              <a:t>정답이 절반 확률로 0(고체) 또는 1(공극)인 픽셀 하나를 생각합니다</a:t>
             </a:r>
           </a:p>
           <a:p>
@@ -5748,7 +6583,7 @@
               </a:spcAft>
             </a:pPr>
             <a:r>
-              <a:rPr sz="1600" b="0">
+              <a:rPr sz="1800" b="0">
                 <a:solidFill>
                   <a:srgbClr val="EA851B"/>
                 </a:solidFill>
@@ -5757,13 +6592,13 @@
               <a:t>•  </a:t>
             </a:r>
             <a:r>
-              <a:rPr sz="1600" b="0">
+              <a:rPr sz="1800" b="0">
                 <a:solidFill>
                   <a:srgbClr val="181818"/>
                 </a:solidFill>
                 <a:latin typeface="Pretendard SemiBold"/>
               </a:rPr>
-              <a:t>평균 = 회색 → 어느 쪽도 아닌 흐릿한 값</a:t>
+              <a:t>L2 기대손실: ŷ=0.5(회색)가 유일한 최소 — 회색을 보상</a:t>
             </a:r>
           </a:p>
           <a:p>
@@ -5776,7 +6611,7 @@
               </a:spcAft>
             </a:pPr>
             <a:r>
-              <a:rPr sz="1600" b="0">
+              <a:rPr sz="1800" b="0">
                 <a:solidFill>
                   <a:srgbClr val="EA851B"/>
                 </a:solidFill>
@@ -5785,13 +6620,13 @@
               <a:t>•  </a:t>
             </a:r>
             <a:r>
-              <a:rPr sz="1600" b="0">
+              <a:rPr sz="1800" b="0">
                 <a:solidFill>
                   <a:srgbClr val="181818"/>
                 </a:solidFill>
                 <a:latin typeface="Pretendard SemiBold"/>
               </a:rPr>
-              <a:t>수식: argmin E|y−ŷ| = median(y)</a:t>
+              <a:t>L1 기대손실: 0~1 어디든 0.5로 동일 — 회색을 벌하지 않음</a:t>
             </a:r>
           </a:p>
           <a:p>
@@ -5804,7 +6639,7 @@
               </a:spcAft>
             </a:pPr>
             <a:r>
-              <a:rPr sz="1600" b="0">
+              <a:rPr sz="1800" b="0">
                 <a:solidFill>
                   <a:srgbClr val="EA851B"/>
                 </a:solidFill>
@@ -5813,13 +6648,109 @@
               <a:t>•  </a:t>
             </a:r>
             <a:r>
-              <a:rPr sz="1600" b="0">
+              <a:rPr sz="1800" b="0">
                 <a:solidFill>
                   <a:srgbClr val="181818"/>
                 </a:solidFill>
                 <a:latin typeface="Pretendard SemiBold"/>
               </a:rPr>
-              <a:t>진짜 암석엔 없는 "회색"을 만든다</a:t>
+              <a:t>결론: 픽셀 단위 손실은 "확신하라"는 압력을 만들지 못한다</a:t>
+            </a:r>
+          </a:p>
+        </p:txBody>
+      </p:sp>
+      <p:sp>
+        <p:nvSpPr>
+          <p:cNvPr id="7" name="Rounded Rectangle 6"/>
+          <p:cNvSpPr/>
+          <p:nvPr/>
+        </p:nvSpPr>
+        <p:spPr>
+          <a:xfrm>
+            <a:off x="731520" y="4572000"/>
+            <a:ext cx="8229600" cy="1280160"/>
+          </a:xfrm>
+          <a:prstGeom prst="roundRect">
+            <a:avLst/>
+          </a:prstGeom>
+          <a:solidFill>
+            <a:srgbClr val="F6F6F6"/>
+          </a:solidFill>
+          <a:ln>
+            <a:noFill/>
+          </a:ln>
+        </p:spPr>
+        <p:style>
+          <a:lnRef idx="1">
+            <a:schemeClr val="accent1"/>
+          </a:lnRef>
+          <a:fillRef idx="3">
+            <a:schemeClr val="accent1"/>
+          </a:fillRef>
+          <a:effectRef idx="2">
+            <a:schemeClr val="accent1"/>
+          </a:effectRef>
+          <a:fontRef idx="minor">
+            <a:schemeClr val="lt1"/>
+          </a:fontRef>
+        </p:style>
+        <p:txBody>
+          <a:bodyPr rtlCol="0" anchor="ctr"/>
+          <a:lstStyle/>
+          <a:p/>
+        </p:txBody>
+      </p:sp>
+      <p:sp>
+        <p:nvSpPr>
+          <p:cNvPr id="8" name="TextBox 7"/>
+          <p:cNvSpPr txBox="1"/>
+          <p:nvPr/>
+        </p:nvSpPr>
+        <p:spPr>
+          <a:xfrm>
+            <a:off x="731520" y="4572000"/>
+            <a:ext cx="8229600" cy="1280160"/>
+          </a:xfrm>
+          <a:prstGeom prst="rect">
+            <a:avLst/>
+          </a:prstGeom>
+          <a:noFill/>
+        </p:spPr>
+        <p:txBody>
+          <a:bodyPr wrap="square" lIns="137160" tIns="91440" bIns="91440">
+            <a:spAutoFit/>
+          </a:bodyPr>
+          <a:lstStyle/>
+          <a:p>
+            <a:pPr>
+              <a:lnSpc>
+                <a:spcPct val="120000"/>
+              </a:lnSpc>
+            </a:pPr>
+            <a:r>
+              <a:rPr sz="1400" b="0">
+                <a:solidFill>
+                  <a:srgbClr val="181818"/>
+                </a:solidFill>
+                <a:latin typeface="Consolas"/>
+              </a:rPr>
+              <a:t>E[(y-yh)^2] = 0.5*yh^2 + 0.5*(1-yh)^2  -&gt;  min at yh=0.5</a:t>
+            </a:r>
+          </a:p>
+          <a:p>
+            <a:pPr>
+              <a:lnSpc>
+                <a:spcPct val="120000"/>
+              </a:lnSpc>
+            </a:pPr>
+            <a:r>
+              <a:rPr sz="1400" b="0">
+                <a:solidFill>
+                  <a:srgbClr val="181818"/>
+                </a:solidFill>
+                <a:latin typeface="Consolas"/>
+              </a:rPr>
+              <a:t>E[|y-yh|]   = 0.5  (0&lt;=yh&lt;=1 어디서나 동일)</a:t>
             </a:r>
           </a:p>
         </p:txBody>
@@ -5876,7 +6807,7 @@
                 </a:solidFill>
                 <a:latin typeface="Pretendard Black"/>
               </a:rPr>
-              <a:t>threshold 전 출력을 보면 흐림이 보인다</a:t>
+              <a:t>정답이 여럿이면 손실은 "평균"을 고릅니다</a:t>
             </a:r>
           </a:p>
         </p:txBody>
@@ -5997,14 +6928,14 @@
                 </a:solidFill>
                 <a:latin typeface="Pretendard Medium"/>
               </a:rPr>
-              <a:t>4 / 14</a:t>
+              <a:t>4 / 17</a:t>
             </a:r>
           </a:p>
         </p:txBody>
       </p:sp>
       <p:pic>
         <p:nvPicPr>
-          <p:cNvPr id="6" name="Picture 5" descr="W3_continuous_demo.png"/>
+          <p:cNvPr id="6" name="Picture 5" descr="W3_average_trap.png"/>
           <p:cNvPicPr>
             <a:picLocks noChangeAspect="1"/>
           </p:cNvPicPr>
@@ -6018,8 +6949,8 @@
         </p:blipFill>
         <p:spPr>
           <a:xfrm>
-            <a:off x="1463040" y="1371600"/>
-            <a:ext cx="9326880" cy="5989791"/>
+            <a:off x="548640" y="1463040"/>
+            <a:ext cx="7863840" cy="2326194"/>
           </a:xfrm>
           <a:prstGeom prst="rect">
             <a:avLst/>
@@ -6034,8 +6965,8 @@
         </p:nvSpPr>
         <p:spPr>
           <a:xfrm>
-            <a:off x="1463040" y="6035040"/>
-            <a:ext cx="9326880" cy="548640"/>
+            <a:off x="8686800" y="1828800"/>
+            <a:ext cx="3200400" cy="3657600"/>
           </a:xfrm>
           <a:prstGeom prst="rect">
             <a:avLst/>
@@ -6043,24 +6974,120 @@
           <a:noFill/>
         </p:spPr>
         <p:txBody>
-          <a:bodyPr wrap="square" lIns="45720" rIns="45720">
+          <a:bodyPr wrap="square">
             <a:spAutoFit/>
           </a:bodyPr>
           <a:lstStyle/>
           <a:p>
-            <a:pPr algn="l">
-              <a:lnSpc>
-                <a:spcPct val="115000"/>
-              </a:lnSpc>
-            </a:pPr>
-            <a:r>
-              <a:rPr sz="1300" b="0">
-                <a:solidFill>
-                  <a:srgbClr val="7A7A7A"/>
+            <a:pPr>
+              <a:lnSpc>
+                <a:spcPct val="130000"/>
+              </a:lnSpc>
+              <a:spcAft>
+                <a:spcPts val="600"/>
+              </a:spcAft>
+            </a:pPr>
+            <a:r>
+              <a:rPr sz="1500" b="0">
+                <a:solidFill>
+                  <a:srgbClr val="EA851B"/>
+                </a:solidFill>
+                <a:latin typeface="Pretendard ExtraBold"/>
+              </a:rPr>
+              <a:t>•  </a:t>
+            </a:r>
+            <a:r>
+              <a:rPr sz="1500" b="0">
+                <a:solidFill>
+                  <a:srgbClr val="181818"/>
                 </a:solidFill>
                 <a:latin typeface="Pretendard SemiBold"/>
               </a:rPr>
-              <a:t>k=5(이웃 먼 어려운 보간)에서 L1은 경계가 회색, GAN은 계단처럼 확신 — 학생 mini 모델 실제 출력</a:t>
+              <a:t>pore가 A일 수도 B일 수도 있으면</a:t>
+            </a:r>
+          </a:p>
+          <a:p>
+            <a:pPr>
+              <a:lnSpc>
+                <a:spcPct val="130000"/>
+              </a:lnSpc>
+              <a:spcAft>
+                <a:spcPts val="600"/>
+              </a:spcAft>
+            </a:pPr>
+            <a:r>
+              <a:rPr sz="1500" b="0">
+                <a:solidFill>
+                  <a:srgbClr val="EA851B"/>
+                </a:solidFill>
+                <a:latin typeface="Pretendard ExtraBold"/>
+              </a:rPr>
+              <a:t>•  </a:t>
+            </a:r>
+            <a:r>
+              <a:rPr sz="1500" b="0">
+                <a:solidFill>
+                  <a:srgbClr val="181818"/>
+                </a:solidFill>
+                <a:latin typeface="Pretendard SemiBold"/>
+              </a:rPr>
+              <a:t>손실 최적해 = 둘을 겹친 회색</a:t>
+            </a:r>
+          </a:p>
+          <a:p>
+            <a:pPr>
+              <a:lnSpc>
+                <a:spcPct val="130000"/>
+              </a:lnSpc>
+              <a:spcAft>
+                <a:spcPts val="600"/>
+              </a:spcAft>
+            </a:pPr>
+            <a:r>
+              <a:rPr sz="1500" b="0">
+                <a:solidFill>
+                  <a:srgbClr val="EA851B"/>
+                </a:solidFill>
+                <a:latin typeface="Pretendard ExtraBold"/>
+              </a:rPr>
+              <a:t>•  </a:t>
+            </a:r>
+            <a:r>
+              <a:rPr sz="1500" b="0">
+                <a:solidFill>
+                  <a:srgbClr val="181818"/>
+                </a:solidFill>
+                <a:latin typeface="Pretendard SemiBold"/>
+              </a:rPr>
+              <a:t>진짜 암석에 없는 이미지</a:t>
+            </a:r>
+          </a:p>
+          <a:p>
+            <a:pPr>
+              <a:lnSpc>
+                <a:spcPct val="130000"/>
+              </a:lnSpc>
+              <a:spcAft>
+                <a:spcPts val="600"/>
+              </a:spcAft>
+            </a:pPr>
+            <a:r>
+              <a:rPr sz="1500" b="0">
+                <a:solidFill>
+                  <a:srgbClr val="EA851B"/>
+                </a:solidFill>
+                <a:latin typeface="Pretendard ExtraBold"/>
+              </a:rPr>
+              <a:t>•  </a:t>
+            </a:r>
+            <a:r>
+              <a:rPr sz="1500" b="0">
+                <a:solidFill>
+                  <a:srgbClr val="181818"/>
+                </a:solidFill>
+                <a:latin typeface="Pretendard SemiBold"/>
+              </a:rPr>
+              <a:t>필요한 압력: "하나를 확신 있게"</a:t>
             </a:r>
           </a:p>
         </p:txBody>
@@ -6085,20 +7112,59 @@
       <p:grpSpPr/>
       <p:sp>
         <p:nvSpPr>
-          <p:cNvPr id="2" name="Rectangle 1"/>
+          <p:cNvPr id="2" name="TextBox 1"/>
+          <p:cNvSpPr txBox="1"/>
+          <p:nvPr/>
+        </p:nvSpPr>
+        <p:spPr>
+          <a:xfrm>
+            <a:off x="457200" y="320040"/>
+            <a:ext cx="11430000" cy="640080"/>
+          </a:xfrm>
+          <a:prstGeom prst="rect">
+            <a:avLst/>
+          </a:prstGeom>
+          <a:noFill/>
+        </p:spPr>
+        <p:txBody>
+          <a:bodyPr wrap="square" lIns="45720" rIns="45720">
+            <a:spAutoFit/>
+          </a:bodyPr>
+          <a:lstStyle/>
+          <a:p>
+            <a:pPr algn="l">
+              <a:lnSpc>
+                <a:spcPct val="115000"/>
+              </a:lnSpc>
+            </a:pPr>
+            <a:r>
+              <a:rPr sz="2800" b="0">
+                <a:solidFill>
+                  <a:srgbClr val="EA851B"/>
+                </a:solidFill>
+                <a:latin typeface="Pretendard Black"/>
+              </a:rPr>
+              <a:t>실측 — 이진화 전 출력의 회색 번짐</a:t>
+            </a:r>
+          </a:p>
+        </p:txBody>
+      </p:sp>
+      <p:sp>
+        <p:nvSpPr>
+          <p:cNvPr id="3" name="Rectangle 2"/>
           <p:cNvSpPr/>
           <p:nvPr/>
         </p:nvSpPr>
         <p:spPr>
           <a:xfrm>
-            <a:off x="0" y="0"/>
-            <a:ext cx="12191695" cy="6858000"/>
+            <a:off x="502920" y="960120"/>
+            <a:ext cx="1097280" cy="54864"/>
           </a:xfrm>
           <a:prstGeom prst="rect">
             <a:avLst/>
           </a:prstGeom>
           <a:solidFill>
-            <a:srgbClr val="FAF5EE"/>
+            <a:srgbClr val="EA851B"/>
           </a:solidFill>
           <a:ln>
             <a:noFill/>
@@ -6121,19 +7187,21 @@
         <p:txBody>
           <a:bodyPr rtlCol="0" anchor="ctr"/>
           <a:lstStyle/>
-          <a:p/>
-        </p:txBody>
-      </p:sp>
-      <p:sp>
-        <p:nvSpPr>
-          <p:cNvPr id="3" name="TextBox 2"/>
+          <a:p>
+            <a:pPr algn="ctr"/>
+          </a:p>
+        </p:txBody>
+      </p:sp>
+      <p:sp>
+        <p:nvSpPr>
+          <p:cNvPr id="4" name="TextBox 3"/>
           <p:cNvSpPr txBox="1"/>
           <p:nvPr/>
         </p:nvSpPr>
         <p:spPr>
           <a:xfrm>
-            <a:off x="731520" y="2286000"/>
-            <a:ext cx="10058400" cy="548640"/>
+            <a:off x="365760" y="6492240"/>
+            <a:ext cx="7315200" cy="274320"/>
           </a:xfrm>
           <a:prstGeom prst="rect">
             <a:avLst/>
@@ -6152,27 +7220,27 @@
               </a:lnSpc>
             </a:pPr>
             <a:r>
-              <a:rPr sz="2000" b="0">
-                <a:solidFill>
-                  <a:srgbClr val="EA851B"/>
-                </a:solidFill>
-                <a:latin typeface="Pretendard ExtraBold"/>
-              </a:rPr>
-              <a:t>Section 2</a:t>
-            </a:r>
-          </a:p>
-        </p:txBody>
-      </p:sp>
-      <p:sp>
-        <p:nvSpPr>
-          <p:cNvPr id="4" name="TextBox 3"/>
+              <a:rPr sz="1000" b="0">
+                <a:solidFill>
+                  <a:srgbClr val="7A7A7A"/>
+                </a:solidFill>
+                <a:latin typeface="Pretendard Medium"/>
+              </a:rPr>
+              <a:t>Week 3</a:t>
+            </a:r>
+          </a:p>
+        </p:txBody>
+      </p:sp>
+      <p:sp>
+        <p:nvSpPr>
+          <p:cNvPr id="5" name="TextBox 4"/>
           <p:cNvSpPr txBox="1"/>
           <p:nvPr/>
         </p:nvSpPr>
         <p:spPr>
           <a:xfrm>
-            <a:off x="731520" y="2834640"/>
-            <a:ext cx="10058400" cy="1371600"/>
+            <a:off x="11155680" y="6492240"/>
+            <a:ext cx="914400" cy="274320"/>
           </a:xfrm>
           <a:prstGeom prst="rect">
             <a:avLst/>
@@ -6185,33 +7253,57 @@
           </a:bodyPr>
           <a:lstStyle/>
           <a:p>
-            <a:pPr algn="l">
+            <a:pPr algn="r">
               <a:lnSpc>
                 <a:spcPct val="115000"/>
               </a:lnSpc>
             </a:pPr>
             <a:r>
-              <a:rPr sz="4400" b="0">
-                <a:solidFill>
-                  <a:srgbClr val="181818"/>
-                </a:solidFill>
-                <a:latin typeface="Pretendard Black"/>
-              </a:rPr>
-              <a:t>GAN의 아이디어</a:t>
-            </a:r>
-          </a:p>
-        </p:txBody>
-      </p:sp>
-      <p:sp>
-        <p:nvSpPr>
-          <p:cNvPr id="5" name="TextBox 4"/>
+              <a:rPr sz="1000" b="0">
+                <a:solidFill>
+                  <a:srgbClr val="7A7A7A"/>
+                </a:solidFill>
+                <a:latin typeface="Pretendard Medium"/>
+              </a:rPr>
+              <a:t>5 / 17</a:t>
+            </a:r>
+          </a:p>
+        </p:txBody>
+      </p:sp>
+      <p:pic>
+        <p:nvPicPr>
+          <p:cNvPr id="6" name="Picture 5" descr="W3_continuous_demo.png"/>
+          <p:cNvPicPr>
+            <a:picLocks noChangeAspect="1"/>
+          </p:cNvPicPr>
+          <p:nvPr/>
+        </p:nvPicPr>
+        <p:blipFill>
+          <a:blip r:embed="rId2"/>
+          <a:stretch>
+            <a:fillRect/>
+          </a:stretch>
+        </p:blipFill>
+        <p:spPr>
+          <a:xfrm>
+            <a:off x="1371600" y="1371600"/>
+            <a:ext cx="9418320" cy="6048514"/>
+          </a:xfrm>
+          <a:prstGeom prst="rect">
+            <a:avLst/>
+          </a:prstGeom>
+        </p:spPr>
+      </p:pic>
+      <p:sp>
+        <p:nvSpPr>
+          <p:cNvPr id="7" name="TextBox 6"/>
           <p:cNvSpPr txBox="1"/>
           <p:nvPr/>
         </p:nvSpPr>
         <p:spPr>
           <a:xfrm>
-            <a:off x="365760" y="6492240"/>
-            <a:ext cx="7315200" cy="274320"/>
+            <a:off x="1371600" y="6035040"/>
+            <a:ext cx="9418320" cy="457200"/>
           </a:xfrm>
           <a:prstGeom prst="rect">
             <a:avLst/>
@@ -6230,52 +7322,13 @@
               </a:lnSpc>
             </a:pPr>
             <a:r>
-              <a:rPr sz="1000" b="0">
+              <a:rPr sz="1300" b="0">
                 <a:solidFill>
                   <a:srgbClr val="7A7A7A"/>
                 </a:solidFill>
-                <a:latin typeface="Pretendard Medium"/>
-              </a:rPr>
-              <a:t>Week 3</a:t>
-            </a:r>
-          </a:p>
-        </p:txBody>
-      </p:sp>
-      <p:sp>
-        <p:nvSpPr>
-          <p:cNvPr id="6" name="TextBox 5"/>
-          <p:cNvSpPr txBox="1"/>
-          <p:nvPr/>
-        </p:nvSpPr>
-        <p:spPr>
-          <a:xfrm>
-            <a:off x="11155680" y="6492240"/>
-            <a:ext cx="914400" cy="274320"/>
-          </a:xfrm>
-          <a:prstGeom prst="rect">
-            <a:avLst/>
-          </a:prstGeom>
-          <a:noFill/>
-        </p:spPr>
-        <p:txBody>
-          <a:bodyPr wrap="square" lIns="45720" rIns="45720">
-            <a:spAutoFit/>
-          </a:bodyPr>
-          <a:lstStyle/>
-          <a:p>
-            <a:pPr algn="r">
-              <a:lnSpc>
-                <a:spcPct val="115000"/>
-              </a:lnSpc>
-            </a:pPr>
-            <a:r>
-              <a:rPr sz="1000" b="0">
-                <a:solidFill>
-                  <a:srgbClr val="7A7A7A"/>
-                </a:solidFill>
-                <a:latin typeface="Pretendard Medium"/>
-              </a:rPr>
-              <a:t>5 / 14</a:t>
+                <a:latin typeface="Pretendard SemiBold"/>
+              </a:rPr>
+              <a:t>k=5 조건의 mini 모델. 정답은 0↔1 계단, L1 모델은 완만한 경사(회색 16%, GAN 8%).</a:t>
             </a:r>
           </a:p>
         </p:txBody>
@@ -6332,7 +7385,7 @@
                 </a:solidFill>
                 <a:latin typeface="Pretendard Black"/>
               </a:rPr>
-              <a:t>위조지폐범 ↔ 감별사</a:t>
+              <a:t>§2 GAN — 그림을 심사하는 두 번째 신경망</a:t>
             </a:r>
           </a:p>
         </p:txBody>
@@ -6453,7 +7506,7 @@
                 </a:solidFill>
                 <a:latin typeface="Pretendard Medium"/>
               </a:rPr>
-              <a:t>6 / 14</a:t>
+              <a:t>6 / 17</a:t>
             </a:r>
           </a:p>
         </p:txBody>
@@ -6543,7 +7596,7 @@
                 </a:solidFill>
                 <a:latin typeface="Pretendard SemiBold"/>
               </a:rPr>
-              <a:t>= 위조지폐범</a:t>
+              <a:t>위조범 — 그럴듯하게 만든다</a:t>
             </a:r>
           </a:p>
           <a:p>
@@ -6571,7 +7624,7 @@
                 </a:solidFill>
                 <a:latin typeface="Pretendard SemiBold"/>
               </a:rPr>
-              <a:t>진짜 같은 슬라이스를 만든다</a:t>
+              <a:t>W2의 mini UNet 그대로</a:t>
             </a:r>
           </a:p>
           <a:p>
@@ -6599,9 +7652,71 @@
                 </a:solidFill>
                 <a:latin typeface="Pretendard SemiBold"/>
               </a:rPr>
-              <a:t>본 과제: W2의 UNet 그대로</a:t>
-            </a:r>
-          </a:p>
+              <a:t>판별자를 속이는 방향으로 학습</a:t>
+            </a:r>
+          </a:p>
+        </p:txBody>
+      </p:sp>
+      <p:sp>
+        <p:nvSpPr>
+          <p:cNvPr id="8" name="TextBox 7"/>
+          <p:cNvSpPr txBox="1"/>
+          <p:nvPr/>
+        </p:nvSpPr>
+        <p:spPr>
+          <a:xfrm>
+            <a:off x="6400800" y="1371600"/>
+            <a:ext cx="5486400" cy="457200"/>
+          </a:xfrm>
+          <a:prstGeom prst="rect">
+            <a:avLst/>
+          </a:prstGeom>
+          <a:noFill/>
+        </p:spPr>
+        <p:txBody>
+          <a:bodyPr wrap="square" lIns="45720" rIns="45720">
+            <a:spAutoFit/>
+          </a:bodyPr>
+          <a:lstStyle/>
+          <a:p>
+            <a:pPr algn="l">
+              <a:lnSpc>
+                <a:spcPct val="115000"/>
+              </a:lnSpc>
+            </a:pPr>
+            <a:r>
+              <a:rPr sz="2200" b="0">
+                <a:solidFill>
+                  <a:srgbClr val="EA851B"/>
+                </a:solidFill>
+                <a:latin typeface="Pretendard Black"/>
+              </a:rPr>
+              <a:t>Discriminator (판별자)</a:t>
+            </a:r>
+          </a:p>
+        </p:txBody>
+      </p:sp>
+      <p:sp>
+        <p:nvSpPr>
+          <p:cNvPr id="9" name="TextBox 8"/>
+          <p:cNvSpPr txBox="1"/>
+          <p:nvPr/>
+        </p:nvSpPr>
+        <p:spPr>
+          <a:xfrm>
+            <a:off x="6400800" y="1920240"/>
+            <a:ext cx="5486400" cy="4572000"/>
+          </a:xfrm>
+          <a:prstGeom prst="rect">
+            <a:avLst/>
+          </a:prstGeom>
+          <a:noFill/>
+        </p:spPr>
+        <p:txBody>
+          <a:bodyPr wrap="square">
+            <a:spAutoFit/>
+          </a:bodyPr>
+          <a:lstStyle/>
           <a:p>
             <a:pPr>
               <a:lnSpc>
@@ -6627,21 +7742,77 @@
                 </a:solidFill>
                 <a:latin typeface="Pretendard SemiBold"/>
               </a:rPr>
-              <a:t>학습 후에도 이것만 배포</a:t>
-            </a:r>
-          </a:p>
-        </p:txBody>
-      </p:sp>
-      <p:sp>
-        <p:nvSpPr>
-          <p:cNvPr id="8" name="TextBox 7"/>
+              <a:t>감별사 — 진짜인지 심사한다</a:t>
+            </a:r>
+          </a:p>
+          <a:p>
+            <a:pPr>
+              <a:lnSpc>
+                <a:spcPct val="130000"/>
+              </a:lnSpc>
+              <a:spcAft>
+                <a:spcPts val="600"/>
+              </a:spcAft>
+            </a:pPr>
+            <a:r>
+              <a:rPr sz="1600" b="0">
+                <a:solidFill>
+                  <a:srgbClr val="EA851B"/>
+                </a:solidFill>
+                <a:latin typeface="Pretendard ExtraBold"/>
+              </a:rPr>
+              <a:t>•  </a:t>
+            </a:r>
+            <a:r>
+              <a:rPr sz="1600" b="0">
+                <a:solidFill>
+                  <a:srgbClr val="181818"/>
+                </a:solidFill>
+                <a:latin typeface="Pretendard SemiBold"/>
+              </a:rPr>
+              <a:t>새로 만드는 작은 CNN (~168K)</a:t>
+            </a:r>
+          </a:p>
+          <a:p>
+            <a:pPr>
+              <a:lnSpc>
+                <a:spcPct val="130000"/>
+              </a:lnSpc>
+              <a:spcAft>
+                <a:spcPts val="600"/>
+              </a:spcAft>
+            </a:pPr>
+            <a:r>
+              <a:rPr sz="1600" b="0">
+                <a:solidFill>
+                  <a:srgbClr val="EA851B"/>
+                </a:solidFill>
+                <a:latin typeface="Pretendard ExtraBold"/>
+              </a:rPr>
+              <a:t>•  </a:t>
+            </a:r>
+            <a:r>
+              <a:rPr sz="1600" b="0">
+                <a:solidFill>
+                  <a:srgbClr val="181818"/>
+                </a:solidFill>
+                <a:latin typeface="Pretendard SemiBold"/>
+              </a:rPr>
+              <a:t>학습이 끝나면 배포에서 제외</a:t>
+            </a:r>
+          </a:p>
+        </p:txBody>
+      </p:sp>
+      <p:sp>
+        <p:nvSpPr>
+          <p:cNvPr id="10" name="TextBox 9"/>
           <p:cNvSpPr txBox="1"/>
           <p:nvPr/>
         </p:nvSpPr>
         <p:spPr>
           <a:xfrm>
-            <a:off x="6400800" y="1371600"/>
-            <a:ext cx="5486400" cy="457200"/>
+            <a:off x="731520" y="5577840"/>
+            <a:ext cx="10972800" cy="640080"/>
           </a:xfrm>
           <a:prstGeom prst="rect">
             <a:avLst/>
@@ -6660,187 +7831,13 @@
               </a:lnSpc>
             </a:pPr>
             <a:r>
-              <a:rPr sz="2200" b="0">
+              <a:rPr sz="1600" b="1">
                 <a:solidFill>
                   <a:srgbClr val="EA851B"/>
                 </a:solidFill>
-                <a:latin typeface="Pretendard Black"/>
-              </a:rPr>
-              <a:t>Discriminator (판별자)</a:t>
-            </a:r>
-          </a:p>
-        </p:txBody>
-      </p:sp>
-      <p:sp>
-        <p:nvSpPr>
-          <p:cNvPr id="9" name="TextBox 8"/>
-          <p:cNvSpPr txBox="1"/>
-          <p:nvPr/>
-        </p:nvSpPr>
-        <p:spPr>
-          <a:xfrm>
-            <a:off x="6400800" y="1920240"/>
-            <a:ext cx="5486400" cy="4572000"/>
-          </a:xfrm>
-          <a:prstGeom prst="rect">
-            <a:avLst/>
-          </a:prstGeom>
-          <a:noFill/>
-        </p:spPr>
-        <p:txBody>
-          <a:bodyPr wrap="square">
-            <a:spAutoFit/>
-          </a:bodyPr>
-          <a:lstStyle/>
-          <a:p>
-            <a:pPr>
-              <a:lnSpc>
-                <a:spcPct val="130000"/>
-              </a:lnSpc>
-              <a:spcAft>
-                <a:spcPts val="600"/>
-              </a:spcAft>
-            </a:pPr>
-            <a:r>
-              <a:rPr sz="1600" b="0">
-                <a:solidFill>
-                  <a:srgbClr val="EA851B"/>
-                </a:solidFill>
-                <a:latin typeface="Pretendard ExtraBold"/>
-              </a:rPr>
-              <a:t>•  </a:t>
-            </a:r>
-            <a:r>
-              <a:rPr sz="1600" b="0">
-                <a:solidFill>
-                  <a:srgbClr val="181818"/>
-                </a:solidFill>
                 <a:latin typeface="Pretendard SemiBold"/>
               </a:rPr>
-              <a:t>= 감별사</a:t>
-            </a:r>
-          </a:p>
-          <a:p>
-            <a:pPr>
-              <a:lnSpc>
-                <a:spcPct val="130000"/>
-              </a:lnSpc>
-              <a:spcAft>
-                <a:spcPts val="600"/>
-              </a:spcAft>
-            </a:pPr>
-            <a:r>
-              <a:rPr sz="1600" b="0">
-                <a:solidFill>
-                  <a:srgbClr val="EA851B"/>
-                </a:solidFill>
-                <a:latin typeface="Pretendard ExtraBold"/>
-              </a:rPr>
-              <a:t>•  </a:t>
-            </a:r>
-            <a:r>
-              <a:rPr sz="1600" b="0">
-                <a:solidFill>
-                  <a:srgbClr val="181818"/>
-                </a:solidFill>
-                <a:latin typeface="Pretendard SemiBold"/>
-              </a:rPr>
-              <a:t>"진짜 암석 단면인가?" 판정</a:t>
-            </a:r>
-          </a:p>
-          <a:p>
-            <a:pPr>
-              <a:lnSpc>
-                <a:spcPct val="130000"/>
-              </a:lnSpc>
-              <a:spcAft>
-                <a:spcPts val="600"/>
-              </a:spcAft>
-            </a:pPr>
-            <a:r>
-              <a:rPr sz="1600" b="0">
-                <a:solidFill>
-                  <a:srgbClr val="EA851B"/>
-                </a:solidFill>
-                <a:latin typeface="Pretendard ExtraBold"/>
-              </a:rPr>
-              <a:t>•  </a:t>
-            </a:r>
-            <a:r>
-              <a:rPr sz="1600" b="0">
-                <a:solidFill>
-                  <a:srgbClr val="181818"/>
-                </a:solidFill>
-                <a:latin typeface="Pretendard SemiBold"/>
-              </a:rPr>
-              <a:t>새로 만드는 작은 CNN</a:t>
-            </a:r>
-          </a:p>
-          <a:p>
-            <a:pPr>
-              <a:lnSpc>
-                <a:spcPct val="130000"/>
-              </a:lnSpc>
-              <a:spcAft>
-                <a:spcPts val="600"/>
-              </a:spcAft>
-            </a:pPr>
-            <a:r>
-              <a:rPr sz="1600" b="0">
-                <a:solidFill>
-                  <a:srgbClr val="EA851B"/>
-                </a:solidFill>
-                <a:latin typeface="Pretendard ExtraBold"/>
-              </a:rPr>
-              <a:t>•  </a:t>
-            </a:r>
-            <a:r>
-              <a:rPr sz="1600" b="0">
-                <a:solidFill>
-                  <a:srgbClr val="181818"/>
-                </a:solidFill>
-                <a:latin typeface="Pretendard SemiBold"/>
-              </a:rPr>
-              <a:t>학습 끝나면 버린다</a:t>
-            </a:r>
-          </a:p>
-        </p:txBody>
-      </p:sp>
-      <p:sp>
-        <p:nvSpPr>
-          <p:cNvPr id="10" name="TextBox 9"/>
-          <p:cNvSpPr txBox="1"/>
-          <p:nvPr/>
-        </p:nvSpPr>
-        <p:spPr>
-          <a:xfrm>
-            <a:off x="640080" y="5760720"/>
-            <a:ext cx="10972800" cy="640080"/>
-          </a:xfrm>
-          <a:prstGeom prst="rect">
-            <a:avLst/>
-          </a:prstGeom>
-          <a:noFill/>
-        </p:spPr>
-        <p:txBody>
-          <a:bodyPr wrap="square" lIns="45720" rIns="45720">
-            <a:spAutoFit/>
-          </a:bodyPr>
-          <a:lstStyle/>
-          <a:p>
-            <a:pPr algn="l">
-              <a:lnSpc>
-                <a:spcPct val="115000"/>
-              </a:lnSpc>
-            </a:pPr>
-            <a:r>
-              <a:rPr sz="1500" b="0">
-                <a:solidFill>
-                  <a:srgbClr val="EA851B"/>
-                </a:solidFill>
-                <a:latin typeface="Pretendard SemiBold"/>
-              </a:rPr>
-              <a:t>경쟁(arms race)이 곧 학습 — 위조범이 정교해지면 감별사도 예리해지고, 다시 위조범이 정교해진다</a:t>
+              <a:t>진짜 단면에 회색 경계는 없다 → 회색을 내면 들킨다 → 생성자는 확신 있는 구조를 배운다</a:t>
             </a:r>
           </a:p>
         </p:txBody>
@@ -6897,7 +7894,7 @@
                 </a:solidFill>
                 <a:latin typeface="Pretendard Black"/>
               </a:rPr>
-              <a:t>hinge 손실 — "확실히 맞히면 벌점 0"</a:t>
+              <a:t>min-max 게임과 hinge 손실</a:t>
             </a:r>
           </a:p>
         </p:txBody>
@@ -7018,7 +8015,7 @@
                 </a:solidFill>
                 <a:latin typeface="Pretendard Medium"/>
               </a:rPr>
-              <a:t>7 / 14</a:t>
+              <a:t>7 / 17</a:t>
             </a:r>
           </a:p>
         </p:txBody>
@@ -7039,8 +8036,8 @@
         </p:blipFill>
         <p:spPr>
           <a:xfrm>
-            <a:off x="457200" y="1463040"/>
-            <a:ext cx="6949440" cy="2430465"/>
+            <a:off x="548640" y="1463040"/>
+            <a:ext cx="7498079" cy="2622344"/>
           </a:xfrm>
           <a:prstGeom prst="rect">
             <a:avLst/>
@@ -7055,8 +8052,8 @@
         </p:nvSpPr>
         <p:spPr>
           <a:xfrm>
-            <a:off x="7589520" y="1828800"/>
-            <a:ext cx="4206240" cy="4114800"/>
+            <a:off x="8321040" y="1828800"/>
+            <a:ext cx="3657600" cy="3657600"/>
           </a:xfrm>
           <a:prstGeom prst="rect">
             <a:avLst/>
@@ -7078,7 +8075,7 @@
               </a:spcAft>
             </a:pPr>
             <a:r>
-              <a:rPr sz="1600" b="0">
+              <a:rPr sz="1500" b="0">
                 <a:solidFill>
                   <a:srgbClr val="EA851B"/>
                 </a:solidFill>
@@ -7087,13 +8084,13 @@
               <a:t>•  </a:t>
             </a:r>
             <a:r>
-              <a:rPr sz="1600" b="0">
+              <a:rPr sz="1500" b="0">
                 <a:solidFill>
                   <a:srgbClr val="181818"/>
                 </a:solidFill>
                 <a:latin typeface="Pretendard SemiBold"/>
               </a:rPr>
-              <a:t>D 손실 = max(0, 1−D(real)) + max(0, 1+D(fake))</a:t>
+              <a:t>D: 진짜 ≥ +1, 가짜 ≤ −1 로 여유 있게</a:t>
             </a:r>
           </a:p>
           <a:p>
@@ -7106,7 +8103,7 @@
               </a:spcAft>
             </a:pPr>
             <a:r>
-              <a:rPr sz="1600" b="0">
+              <a:rPr sz="1500" b="0">
                 <a:solidFill>
                   <a:srgbClr val="EA851B"/>
                 </a:solidFill>
@@ -7115,13 +8112,13 @@
               <a:t>•  </a:t>
             </a:r>
             <a:r>
-              <a:rPr sz="1600" b="0">
+              <a:rPr sz="1500" b="0">
                 <a:solidFill>
                   <a:srgbClr val="181818"/>
                 </a:solidFill>
                 <a:latin typeface="Pretendard SemiBold"/>
               </a:rPr>
-              <a:t>진짜는 ≥+1, 가짜는 ≤−1 이면 벌점 0</a:t>
+              <a:t>이미 확실한 표본은 벌점 0</a:t>
             </a:r>
           </a:p>
           <a:p>
@@ -7134,7 +8131,7 @@
               </a:spcAft>
             </a:pPr>
             <a:r>
-              <a:rPr sz="1600" b="0">
+              <a:rPr sz="1500" b="0">
                 <a:solidFill>
                   <a:srgbClr val="EA851B"/>
                 </a:solidFill>
@@ -7143,13 +8140,13 @@
               <a:t>•  </a:t>
             </a:r>
             <a:r>
-              <a:rPr sz="1600" b="0">
+              <a:rPr sz="1500" b="0">
                 <a:solidFill>
                   <a:srgbClr val="181818"/>
                 </a:solidFill>
                 <a:latin typeface="Pretendard SemiBold"/>
               </a:rPr>
-              <a:t>G 적대적 손실 = −D(fake)  (판별자를 속임)</a:t>
+              <a:t>G 손실 = −D(G(x)) — 점수를 올리는 방향</a:t>
             </a:r>
           </a:p>
           <a:p>
@@ -7162,7 +8159,7 @@
               </a:spcAft>
             </a:pPr>
             <a:r>
-              <a:rPr sz="1600" b="0">
+              <a:rPr sz="1500" b="0">
                 <a:solidFill>
                   <a:srgbClr val="EA851B"/>
                 </a:solidFill>
@@ -7171,13 +8168,13 @@
               <a:t>•  </a:t>
             </a:r>
             <a:r>
-              <a:rPr sz="1600" b="0">
+              <a:rPr sz="1500" b="0">
                 <a:solidFill>
                   <a:srgbClr val="181818"/>
                 </a:solidFill>
                 <a:latin typeface="Pretendard SemiBold"/>
               </a:rPr>
-              <a:t>애매한 구간에서만 벌점 → 경계를 넉넉히 벌려 안정</a:t>
+              <a:t>log 원식보다 gradient가 안정적</a:t>
             </a:r>
           </a:p>
         </p:txBody>
@@ -7202,20 +8199,59 @@
       <p:grpSpPr/>
       <p:sp>
         <p:nvSpPr>
-          <p:cNvPr id="2" name="Rectangle 1"/>
+          <p:cNvPr id="2" name="TextBox 1"/>
+          <p:cNvSpPr txBox="1"/>
+          <p:nvPr/>
+        </p:nvSpPr>
+        <p:spPr>
+          <a:xfrm>
+            <a:off x="457200" y="320040"/>
+            <a:ext cx="11430000" cy="640080"/>
+          </a:xfrm>
+          <a:prstGeom prst="rect">
+            <a:avLst/>
+          </a:prstGeom>
+          <a:noFill/>
+        </p:spPr>
+        <p:txBody>
+          <a:bodyPr wrap="square" lIns="45720" rIns="45720">
+            <a:spAutoFit/>
+          </a:bodyPr>
+          <a:lstStyle/>
+          <a:p>
+            <a:pPr algn="l">
+              <a:lnSpc>
+                <a:spcPct val="115000"/>
+              </a:lnSpc>
+            </a:pPr>
+            <a:r>
+              <a:rPr sz="2800" b="0">
+                <a:solidFill>
+                  <a:srgbClr val="EA851B"/>
+                </a:solidFill>
+                <a:latin typeface="Pretendard Black"/>
+              </a:rPr>
+              <a:t>한 배치, 두 번의 갱신</a:t>
+            </a:r>
+          </a:p>
+        </p:txBody>
+      </p:sp>
+      <p:sp>
+        <p:nvSpPr>
+          <p:cNvPr id="3" name="Rectangle 2"/>
           <p:cNvSpPr/>
           <p:nvPr/>
         </p:nvSpPr>
         <p:spPr>
           <a:xfrm>
-            <a:off x="0" y="0"/>
-            <a:ext cx="12191695" cy="6858000"/>
+            <a:off x="502920" y="960120"/>
+            <a:ext cx="1097280" cy="54864"/>
           </a:xfrm>
           <a:prstGeom prst="rect">
             <a:avLst/>
           </a:prstGeom>
           <a:solidFill>
-            <a:srgbClr val="FAF5EE"/>
+            <a:srgbClr val="EA851B"/>
           </a:solidFill>
           <a:ln>
             <a:noFill/>
@@ -7238,19 +8274,21 @@
         <p:txBody>
           <a:bodyPr rtlCol="0" anchor="ctr"/>
           <a:lstStyle/>
-          <a:p/>
-        </p:txBody>
-      </p:sp>
-      <p:sp>
-        <p:nvSpPr>
-          <p:cNvPr id="3" name="TextBox 2"/>
+          <a:p>
+            <a:pPr algn="ctr"/>
+          </a:p>
+        </p:txBody>
+      </p:sp>
+      <p:sp>
+        <p:nvSpPr>
+          <p:cNvPr id="4" name="TextBox 3"/>
           <p:cNvSpPr txBox="1"/>
           <p:nvPr/>
         </p:nvSpPr>
         <p:spPr>
           <a:xfrm>
-            <a:off x="731520" y="2286000"/>
-            <a:ext cx="10058400" cy="548640"/>
+            <a:off x="365760" y="6492240"/>
+            <a:ext cx="7315200" cy="274320"/>
           </a:xfrm>
           <a:prstGeom prst="rect">
             <a:avLst/>
@@ -7269,27 +8307,27 @@
               </a:lnSpc>
             </a:pPr>
             <a:r>
-              <a:rPr sz="2000" b="0">
-                <a:solidFill>
-                  <a:srgbClr val="EA851B"/>
-                </a:solidFill>
-                <a:latin typeface="Pretendard ExtraBold"/>
-              </a:rPr>
-              <a:t>Section 3</a:t>
-            </a:r>
-          </a:p>
-        </p:txBody>
-      </p:sp>
-      <p:sp>
-        <p:nvSpPr>
-          <p:cNvPr id="4" name="TextBox 3"/>
+              <a:rPr sz="1000" b="0">
+                <a:solidFill>
+                  <a:srgbClr val="7A7A7A"/>
+                </a:solidFill>
+                <a:latin typeface="Pretendard Medium"/>
+              </a:rPr>
+              <a:t>Week 3</a:t>
+            </a:r>
+          </a:p>
+        </p:txBody>
+      </p:sp>
+      <p:sp>
+        <p:nvSpPr>
+          <p:cNvPr id="5" name="TextBox 4"/>
           <p:cNvSpPr txBox="1"/>
           <p:nvPr/>
         </p:nvSpPr>
         <p:spPr>
           <a:xfrm>
-            <a:off x="731520" y="2834640"/>
-            <a:ext cx="10058400" cy="1371600"/>
+            <a:off x="11155680" y="6492240"/>
+            <a:ext cx="914400" cy="274320"/>
           </a:xfrm>
           <a:prstGeom prst="rect">
             <a:avLst/>
@@ -7302,33 +8340,74 @@
           </a:bodyPr>
           <a:lstStyle/>
           <a:p>
-            <a:pPr algn="l">
+            <a:pPr algn="r">
               <a:lnSpc>
                 <a:spcPct val="115000"/>
               </a:lnSpc>
             </a:pPr>
             <a:r>
-              <a:rPr sz="4400" b="0">
-                <a:solidFill>
-                  <a:srgbClr val="181818"/>
-                </a:solidFill>
-                <a:latin typeface="Pretendard Black"/>
-              </a:rPr>
-              <a:t>우리 문제에 맞추기 — pix2pix</a:t>
-            </a:r>
-          </a:p>
-        </p:txBody>
-      </p:sp>
-      <p:sp>
-        <p:nvSpPr>
-          <p:cNvPr id="5" name="TextBox 4"/>
+              <a:rPr sz="1000" b="0">
+                <a:solidFill>
+                  <a:srgbClr val="7A7A7A"/>
+                </a:solidFill>
+                <a:latin typeface="Pretendard Medium"/>
+              </a:rPr>
+              <a:t>8 / 17</a:t>
+            </a:r>
+          </a:p>
+        </p:txBody>
+      </p:sp>
+      <p:sp>
+        <p:nvSpPr>
+          <p:cNvPr id="6" name="Rounded Rectangle 5"/>
+          <p:cNvSpPr/>
+          <p:nvPr/>
+        </p:nvSpPr>
+        <p:spPr>
+          <a:xfrm>
+            <a:off x="731520" y="1463040"/>
+            <a:ext cx="7772400" cy="2468880"/>
+          </a:xfrm>
+          <a:prstGeom prst="roundRect">
+            <a:avLst/>
+          </a:prstGeom>
+          <a:solidFill>
+            <a:srgbClr val="F6F6F6"/>
+          </a:solidFill>
+          <a:ln>
+            <a:noFill/>
+          </a:ln>
+        </p:spPr>
+        <p:style>
+          <a:lnRef idx="1">
+            <a:schemeClr val="accent1"/>
+          </a:lnRef>
+          <a:fillRef idx="3">
+            <a:schemeClr val="accent1"/>
+          </a:fillRef>
+          <a:effectRef idx="2">
+            <a:schemeClr val="accent1"/>
+          </a:effectRef>
+          <a:fontRef idx="minor">
+            <a:schemeClr val="lt1"/>
+          </a:fontRef>
+        </p:style>
+        <p:txBody>
+          <a:bodyPr rtlCol="0" anchor="ctr"/>
+          <a:lstStyle/>
+          <a:p/>
+        </p:txBody>
+      </p:sp>
+      <p:sp>
+        <p:nvSpPr>
+          <p:cNvPr id="7" name="TextBox 6"/>
           <p:cNvSpPr txBox="1"/>
           <p:nvPr/>
         </p:nvSpPr>
         <p:spPr>
           <a:xfrm>
-            <a:off x="365760" y="6492240"/>
-            <a:ext cx="7315200" cy="274320"/>
+            <a:off x="731520" y="1463040"/>
+            <a:ext cx="7772400" cy="2468880"/>
           </a:xfrm>
           <a:prstGeom prst="rect">
             <a:avLst/>
@@ -7336,38 +8415,118 @@
           <a:noFill/>
         </p:spPr>
         <p:txBody>
-          <a:bodyPr wrap="square" lIns="45720" rIns="45720">
+          <a:bodyPr wrap="square" lIns="137160" tIns="91440" bIns="91440">
             <a:spAutoFit/>
           </a:bodyPr>
           <a:lstStyle/>
           <a:p>
-            <a:pPr algn="l">
-              <a:lnSpc>
-                <a:spcPct val="115000"/>
-              </a:lnSpc>
-            </a:pPr>
-            <a:r>
-              <a:rPr sz="1000" b="0">
-                <a:solidFill>
-                  <a:srgbClr val="7A7A7A"/>
-                </a:solidFill>
-                <a:latin typeface="Pretendard Medium"/>
-              </a:rPr>
-              <a:t>Week 3</a:t>
-            </a:r>
-          </a:p>
-        </p:txBody>
-      </p:sp>
-      <p:sp>
-        <p:nvSpPr>
-          <p:cNvPr id="6" name="TextBox 5"/>
+            <a:pPr>
+              <a:lnSpc>
+                <a:spcPct val="120000"/>
+              </a:lnSpc>
+            </a:pPr>
+            <a:r>
+              <a:rPr sz="1400" b="0">
+                <a:solidFill>
+                  <a:srgbClr val="181818"/>
+                </a:solidFill>
+                <a:latin typeface="Consolas"/>
+              </a:rPr>
+              <a:t># STEP A - 판별자 (G는 detach로 보호)</a:t>
+            </a:r>
+          </a:p>
+          <a:p>
+            <a:pPr>
+              <a:lnSpc>
+                <a:spcPct val="120000"/>
+              </a:lnSpc>
+            </a:pPr>
+            <a:r>
+              <a:rPr sz="1400" b="0">
+                <a:solidFill>
+                  <a:srgbClr val="181818"/>
+                </a:solidFill>
+                <a:latin typeface="Consolas"/>
+              </a:rPr>
+              <a:t>d_loss = d_hinge_loss(D, cond, y, G(x).detach())</a:t>
+            </a:r>
+          </a:p>
+          <a:p>
+            <a:pPr>
+              <a:lnSpc>
+                <a:spcPct val="120000"/>
+              </a:lnSpc>
+            </a:pPr>
+            <a:r>
+              <a:rPr sz="1400" b="0">
+                <a:solidFill>
+                  <a:srgbClr val="181818"/>
+                </a:solidFill>
+                <a:latin typeface="Consolas"/>
+              </a:rPr>
+              <a:t>d_loss.backward(); opt_D.step()</a:t>
+            </a:r>
+          </a:p>
+          <a:p>
+            <a:pPr>
+              <a:lnSpc>
+                <a:spcPct val="120000"/>
+              </a:lnSpc>
+            </a:pPr>
+            <a:r>
+              <a:rPr sz="1400" b="0">
+                <a:solidFill>
+                  <a:srgbClr val="181818"/>
+                </a:solidFill>
+                <a:latin typeface="Consolas"/>
+              </a:rPr>
+              <a:t># STEP B - 생성자 (D는 고정)</a:t>
+            </a:r>
+          </a:p>
+          <a:p>
+            <a:pPr>
+              <a:lnSpc>
+                <a:spcPct val="120000"/>
+              </a:lnSpc>
+            </a:pPr>
+            <a:r>
+              <a:rPr sz="1400" b="0">
+                <a:solidFill>
+                  <a:srgbClr val="181818"/>
+                </a:solidFill>
+                <a:latin typeface="Consolas"/>
+              </a:rPr>
+              <a:t>g_loss = w1*L1 + ws*SSIM + lam*g_hinge_loss(D, cond, G(x))</a:t>
+            </a:r>
+          </a:p>
+          <a:p>
+            <a:pPr>
+              <a:lnSpc>
+                <a:spcPct val="120000"/>
+              </a:lnSpc>
+            </a:pPr>
+            <a:r>
+              <a:rPr sz="1400" b="0">
+                <a:solidFill>
+                  <a:srgbClr val="181818"/>
+                </a:solidFill>
+                <a:latin typeface="Consolas"/>
+              </a:rPr>
+              <a:t>g_loss.backward(); opt_G.step()</a:t>
+            </a:r>
+          </a:p>
+        </p:txBody>
+      </p:sp>
+      <p:sp>
+        <p:nvSpPr>
+          <p:cNvPr id="8" name="TextBox 7"/>
           <p:cNvSpPr txBox="1"/>
           <p:nvPr/>
         </p:nvSpPr>
         <p:spPr>
           <a:xfrm>
-            <a:off x="11155680" y="6492240"/>
-            <a:ext cx="914400" cy="274320"/>
+            <a:off x="8778240" y="1737360"/>
+            <a:ext cx="3108960" cy="2926080"/>
           </a:xfrm>
           <a:prstGeom prst="rect">
             <a:avLst/>
@@ -7375,24 +8534,92 @@
           <a:noFill/>
         </p:spPr>
         <p:txBody>
-          <a:bodyPr wrap="square" lIns="45720" rIns="45720">
+          <a:bodyPr wrap="square">
             <a:spAutoFit/>
           </a:bodyPr>
           <a:lstStyle/>
           <a:p>
-            <a:pPr algn="r">
-              <a:lnSpc>
-                <a:spcPct val="115000"/>
-              </a:lnSpc>
-            </a:pPr>
-            <a:r>
-              <a:rPr sz="1000" b="0">
-                <a:solidFill>
-                  <a:srgbClr val="7A7A7A"/>
-                </a:solidFill>
-                <a:latin typeface="Pretendard Medium"/>
-              </a:rPr>
-              <a:t>8 / 14</a:t>
+            <a:pPr>
+              <a:lnSpc>
+                <a:spcPct val="130000"/>
+              </a:lnSpc>
+              <a:spcAft>
+                <a:spcPts val="600"/>
+              </a:spcAft>
+            </a:pPr>
+            <a:r>
+              <a:rPr sz="1500" b="0">
+                <a:solidFill>
+                  <a:srgbClr val="EA851B"/>
+                </a:solidFill>
+                <a:latin typeface="Pretendard ExtraBold"/>
+              </a:rPr>
+              <a:t>•  </a:t>
+            </a:r>
+            <a:r>
+              <a:rPr sz="1500" b="0">
+                <a:solidFill>
+                  <a:srgbClr val="181818"/>
+                </a:solidFill>
+                <a:latin typeface="Pretendard SemiBold"/>
+              </a:rPr>
+              <a:t>W2의 4박자 루프가 두 벌로</a:t>
+            </a:r>
+          </a:p>
+          <a:p>
+            <a:pPr>
+              <a:lnSpc>
+                <a:spcPct val="130000"/>
+              </a:lnSpc>
+              <a:spcAft>
+                <a:spcPts val="600"/>
+              </a:spcAft>
+            </a:pPr>
+            <a:r>
+              <a:rPr sz="1500" b="0">
+                <a:solidFill>
+                  <a:srgbClr val="EA851B"/>
+                </a:solidFill>
+                <a:latin typeface="Pretendard ExtraBold"/>
+              </a:rPr>
+              <a:t>•  </a:t>
+            </a:r>
+            <a:r>
+              <a:rPr sz="1500" b="0">
+                <a:solidFill>
+                  <a:srgbClr val="181818"/>
+                </a:solidFill>
+                <a:latin typeface="Pretendard SemiBold"/>
+              </a:rPr>
+              <a:t>옵티마이저도 두 개 (opt_D · opt_G)</a:t>
+            </a:r>
+          </a:p>
+          <a:p>
+            <a:pPr>
+              <a:lnSpc>
+                <a:spcPct val="130000"/>
+              </a:lnSpc>
+              <a:spcAft>
+                <a:spcPts val="600"/>
+              </a:spcAft>
+            </a:pPr>
+            <a:r>
+              <a:rPr sz="1500" b="0">
+                <a:solidFill>
+                  <a:srgbClr val="EA851B"/>
+                </a:solidFill>
+                <a:latin typeface="Pretendard ExtraBold"/>
+              </a:rPr>
+              <a:t>•  </a:t>
+            </a:r>
+            <a:r>
+              <a:rPr sz="1500" b="0">
+                <a:solidFill>
+                  <a:srgbClr val="181818"/>
+                </a:solidFill>
+                <a:latin typeface="Pretendard SemiBold"/>
+              </a:rPr>
+              <a:t>항상 상대의 최신판과 대결</a:t>
             </a:r>
           </a:p>
         </p:txBody>
@@ -7449,7 +8676,7 @@
                 </a:solidFill>
                 <a:latin typeface="Pretendard Black"/>
               </a:rPr>
-              <a:t>세 가지 장치</a:t>
+              <a:t>실측 — 학습된 판별자가 보는 것</a:t>
             </a:r>
           </a:p>
         </p:txBody>
@@ -7570,118 +8797,35 @@
                 </a:solidFill>
                 <a:latin typeface="Pretendard Medium"/>
               </a:rPr>
-              <a:t>9 / 14</a:t>
-            </a:r>
-          </a:p>
-        </p:txBody>
-      </p:sp>
-      <p:sp>
-        <p:nvSpPr>
-          <p:cNvPr id="6" name="TextBox 5"/>
-          <p:cNvSpPr txBox="1"/>
-          <p:nvPr/>
-        </p:nvSpPr>
-        <p:spPr>
-          <a:xfrm>
-            <a:off x="731520" y="1645920"/>
-            <a:ext cx="10972800" cy="2926080"/>
-          </a:xfrm>
-          <a:prstGeom prst="rect">
-            <a:avLst/>
-          </a:prstGeom>
-          <a:noFill/>
-        </p:spPr>
-        <p:txBody>
-          <a:bodyPr wrap="square">
-            <a:spAutoFit/>
-          </a:bodyPr>
-          <a:lstStyle/>
-          <a:p>
-            <a:pPr>
-              <a:lnSpc>
-                <a:spcPct val="130000"/>
-              </a:lnSpc>
-              <a:spcAft>
-                <a:spcPts val="600"/>
-              </a:spcAft>
-            </a:pPr>
-            <a:r>
-              <a:rPr sz="1900" b="0">
-                <a:solidFill>
-                  <a:srgbClr val="EA851B"/>
-                </a:solidFill>
-                <a:latin typeface="Pretendard ExtraBold"/>
-              </a:rPr>
-              <a:t>•  </a:t>
-            </a:r>
-            <a:r>
-              <a:rPr sz="1900" b="0">
-                <a:solidFill>
-                  <a:srgbClr val="181818"/>
-                </a:solidFill>
-                <a:latin typeface="Pretendard SemiBold"/>
-              </a:rPr>
-              <a:t>조건부(conditional) — 판별자가 이웃 슬라이스도 함께 본다 → "사실적이면서 이웃과 일관"</a:t>
-            </a:r>
-          </a:p>
-          <a:p>
-            <a:pPr>
-              <a:lnSpc>
-                <a:spcPct val="130000"/>
-              </a:lnSpc>
-              <a:spcAft>
-                <a:spcPts val="600"/>
-              </a:spcAft>
-            </a:pPr>
-            <a:r>
-              <a:rPr sz="1900" b="0">
-                <a:solidFill>
-                  <a:srgbClr val="EA851B"/>
-                </a:solidFill>
-                <a:latin typeface="Pretendard ExtraBold"/>
-              </a:rPr>
-              <a:t>•  </a:t>
-            </a:r>
-            <a:r>
-              <a:rPr sz="1900" b="0">
-                <a:solidFill>
-                  <a:srgbClr val="181818"/>
-                </a:solidFill>
-                <a:latin typeface="Pretendard SemiBold"/>
-              </a:rPr>
-              <a:t>PatchGAN — 이미지를 조각(patch)마다 진짜/가짜로 판정 → 국소 텍스처·경계에 집중</a:t>
-            </a:r>
-          </a:p>
-          <a:p>
-            <a:pPr>
-              <a:lnSpc>
-                <a:spcPct val="130000"/>
-              </a:lnSpc>
-              <a:spcAft>
-                <a:spcPts val="600"/>
-              </a:spcAft>
-            </a:pPr>
-            <a:r>
-              <a:rPr sz="1900" b="0">
-                <a:solidFill>
-                  <a:srgbClr val="EA851B"/>
-                </a:solidFill>
-                <a:latin typeface="Pretendard ExtraBold"/>
-              </a:rPr>
-              <a:t>•  </a:t>
-            </a:r>
-            <a:r>
-              <a:rPr sz="1900" b="0">
-                <a:solidFill>
-                  <a:srgbClr val="181818"/>
-                </a:solidFill>
-                <a:latin typeface="Pretendard SemiBold"/>
-              </a:rPr>
-              <a:t>Spectral normalization — 판별자의 힘(Lipschitz)에 상한 → 독주를 막아 안정화</a:t>
-            </a:r>
-          </a:p>
-        </p:txBody>
-      </p:sp>
+              <a:t>9 / 17</a:t>
+            </a:r>
+          </a:p>
+        </p:txBody>
+      </p:sp>
+      <p:pic>
+        <p:nvPicPr>
+          <p:cNvPr id="6" name="Picture 5" descr="W3_discriminator_view.png"/>
+          <p:cNvPicPr>
+            <a:picLocks noChangeAspect="1"/>
+          </p:cNvPicPr>
+          <p:nvPr/>
+        </p:nvPicPr>
+        <p:blipFill>
+          <a:blip r:embed="rId2"/>
+          <a:stretch>
+            <a:fillRect/>
+          </a:stretch>
+        </p:blipFill>
+        <p:spPr>
+          <a:xfrm>
+            <a:off x="1920240" y="1280160"/>
+            <a:ext cx="8321040" cy="4992624"/>
+          </a:xfrm>
+          <a:prstGeom prst="rect">
+            <a:avLst/>
+          </a:prstGeom>
+        </p:spPr>
+      </p:pic>
       <p:sp>
         <p:nvSpPr>
           <p:cNvPr id="7" name="TextBox 6"/>
@@ -7690,8 +8834,8 @@
         </p:nvSpPr>
         <p:spPr>
           <a:xfrm>
-            <a:off x="731520" y="5120640"/>
-            <a:ext cx="10972800" cy="731520"/>
+            <a:off x="1920240" y="6217920"/>
+            <a:ext cx="8321040" cy="457200"/>
           </a:xfrm>
           <a:prstGeom prst="rect">
             <a:avLst/>
@@ -7710,13 +8854,13 @@
               </a:lnSpc>
             </a:pPr>
             <a:r>
-              <a:rPr sz="1700" b="1">
-                <a:solidFill>
-                  <a:srgbClr val="1F3A5F"/>
+              <a:rPr sz="1400" b="0">
+                <a:solidFill>
+                  <a:srgbClr val="7A7A7A"/>
                 </a:solidFill>
                 <a:latin typeface="Pretendard SemiBold"/>
               </a:rPr>
-              <a:t>총 손실 = w₁·L1 (정확도) + wₛ·SSIM (구조) + λ·adversarial (사실감) · λ≈0.1 (양념은 적게)</a:t>
+              <a:t>진짜 +2.19 · 흐린 L1 출력 −4.59 (강하게 들킴) · GAN 출력 +0.46 (거의 속음)</a:t>
             </a:r>
           </a:p>
         </p:txBody>

--- a/web/downloads/shared/w3/W3.pptx
+++ b/web/downloads/shared/w3/W3.pptx
@@ -3218,7 +3218,7 @@
                 </a:solidFill>
                 <a:latin typeface="Pretendard Black"/>
               </a:rPr>
-              <a:t>적대적 학습 — pix2pix GAN</a:t>
+              <a:t>적대적 학습 · pix2pix GAN</a:t>
             </a:r>
           </a:p>
         </p:txBody>
@@ -3257,7 +3257,7 @@
                 </a:solidFill>
                 <a:latin typeface="Pretendard SemiBold"/>
               </a:rPr>
-              <a:t>두 신경망을 경쟁시켜 흐림 없는 복원을 — 원리·수식부터 투과율 검증까지</a:t>
+              <a:t>두 신경망을 경쟁시켜 복원의 흐림을 걷어냅니다. 원리·수식부터 투과율 검증까지</a:t>
             </a:r>
           </a:p>
         </p:txBody>
@@ -3487,8 +3487,8 @@
         </p:nvSpPr>
         <p:spPr>
           <a:xfrm>
-            <a:off x="731520" y="1645920"/>
-            <a:ext cx="10972800" cy="2560320"/>
+            <a:off x="502920" y="1417320"/>
+            <a:ext cx="4206240" cy="2743200"/>
           </a:xfrm>
           <a:prstGeom prst="rect">
             <a:avLst/>
@@ -3510,7 +3510,7 @@
               </a:spcAft>
             </a:pPr>
             <a:r>
-              <a:rPr sz="1800" b="0">
+              <a:rPr sz="1500" b="0">
                 <a:solidFill>
                   <a:srgbClr val="EA851B"/>
                 </a:solidFill>
@@ -3519,13 +3519,13 @@
               <a:t>•  </a:t>
             </a:r>
             <a:r>
-              <a:rPr sz="1800" b="0">
+              <a:rPr sz="1500" b="0">
                 <a:solidFill>
                   <a:srgbClr val="181818"/>
                 </a:solidFill>
                 <a:latin typeface="Pretendard SemiBold"/>
               </a:rPr>
-              <a:t>① 조건부 — 판별자도 이웃(문제지)을 본다: "이웃 사이에 올 법한 단면인가"까지 심사</a:t>
+              <a:t>① 조건부: 판별자도 이웃(문제지)을 본다</a:t>
             </a:r>
           </a:p>
           <a:p>
@@ -3538,7 +3538,7 @@
               </a:spcAft>
             </a:pPr>
             <a:r>
-              <a:rPr sz="1800" b="0">
+              <a:rPr sz="1500" b="0">
                 <a:solidFill>
                   <a:srgbClr val="EA851B"/>
                 </a:solidFill>
@@ -3547,13 +3547,13 @@
               <a:t>•  </a:t>
             </a:r>
             <a:r>
-              <a:rPr sz="1800" b="0">
+              <a:rPr sz="1500" b="0">
                 <a:solidFill>
                   <a:srgbClr val="181818"/>
                 </a:solidFill>
                 <a:latin typeface="Pretendard SemiBold"/>
               </a:rPr>
-              <a:t>② PatchGAN — 조각(patch)마다 점수: 국소 경계·텍스처에 민감 (16×16 점수 map)</a:t>
+              <a:t>② PatchGAN: 조각마다 점수 (15×15 점수 map)</a:t>
             </a:r>
           </a:p>
           <a:p>
@@ -3566,7 +3566,7 @@
               </a:spcAft>
             </a:pPr>
             <a:r>
-              <a:rPr sz="1800" b="0">
+              <a:rPr sz="1500" b="0">
                 <a:solidFill>
                   <a:srgbClr val="EA851B"/>
                 </a:solidFill>
@@ -3575,27 +3575,51 @@
               <a:t>•  </a:t>
             </a:r>
             <a:r>
-              <a:rPr sz="1800" b="0">
+              <a:rPr sz="1500" b="0">
                 <a:solidFill>
                   <a:srgbClr val="181818"/>
                 </a:solidFill>
                 <a:latin typeface="Pretendard SemiBold"/>
               </a:rPr>
-              <a:t>③ spectral norm — 판별자 힘에 상한(Lipschitz ≤ 1): 독주를 구조적으로 차단</a:t>
-            </a:r>
-          </a:p>
-        </p:txBody>
-      </p:sp>
-      <p:sp>
-        <p:nvSpPr>
-          <p:cNvPr id="7" name="TextBox 6"/>
+              <a:t>③ spectral norm: 판별자 힘에 상한, 독주 차단</a:t>
+            </a:r>
+          </a:p>
+        </p:txBody>
+      </p:sp>
+      <p:pic>
+        <p:nvPicPr>
+          <p:cNvPr id="7" name="Picture 6" descr="W3_architecture.png"/>
+          <p:cNvPicPr>
+            <a:picLocks noChangeAspect="1"/>
+          </p:cNvPicPr>
+          <p:nvPr/>
+        </p:nvPicPr>
+        <p:blipFill>
+          <a:blip r:embed="rId2"/>
+          <a:stretch>
+            <a:fillRect/>
+          </a:stretch>
+        </p:blipFill>
+        <p:spPr>
+          <a:xfrm>
+            <a:off x="4754880" y="1371600"/>
+            <a:ext cx="7223760" cy="3171407"/>
+          </a:xfrm>
+          <a:prstGeom prst="rect">
+            <a:avLst/>
+          </a:prstGeom>
+        </p:spPr>
+      </p:pic>
+      <p:sp>
+        <p:nvSpPr>
+          <p:cNvPr id="8" name="TextBox 7"/>
           <p:cNvSpPr txBox="1"/>
           <p:nvPr/>
         </p:nvSpPr>
         <p:spPr>
           <a:xfrm>
-            <a:off x="731520" y="4846320"/>
-            <a:ext cx="10972800" cy="731520"/>
+            <a:off x="502920" y="4572000"/>
+            <a:ext cx="4206240" cy="1097280"/>
           </a:xfrm>
           <a:prstGeom prst="rect">
             <a:avLst/>
@@ -3614,13 +3638,13 @@
               </a:lnSpc>
             </a:pPr>
             <a:r>
-              <a:rPr sz="1700" b="1">
+              <a:rPr sz="1500" b="1">
                 <a:solidFill>
                   <a:srgbClr val="1F3A5F"/>
                 </a:solidFill>
                 <a:latin typeface="Pretendard SemiBold"/>
               </a:rPr>
-              <a:t>전체 손실:  L_G = 1.0·L1 (정확도) + 0.3·SSIM (구조) + λ·adversarial (사실감),  λ ≈ 0.1</a:t>
+              <a:t>L_G = 1.0·L1 + 0.3·SSIM + λ·adversarial,  λ ≈ 0.1</a:t>
             </a:r>
           </a:p>
         </p:txBody>
@@ -3944,7 +3968,7 @@
                 </a:solidFill>
                 <a:latin typeface="Pretendard SemiBold"/>
               </a:rPr>
-              <a:t>mode collapse — 한 답만 반복</a:t>
+              <a:t>mode collapse: 한 답만 반복</a:t>
             </a:r>
           </a:p>
         </p:txBody>
@@ -4175,7 +4199,7 @@
                 </a:solidFill>
                 <a:latin typeface="Pretendard Black"/>
               </a:rPr>
-              <a:t>실측 — 균형 잡힌 줄다리기의 곡선</a:t>
+              <a:t>실측: 균형 잡힌 줄다리기의 곡선</a:t>
             </a:r>
           </a:p>
         </p:txBody>
@@ -4359,7 +4383,7 @@
                 </a:solidFill>
                 <a:latin typeface="Pretendard SemiBold"/>
               </a:rPr>
-              <a:t>GAN 시작 후에도 재구성 손실은 계속 하강, D 손실은 0에 붙지 않고 0.3~0.5로 회복.</a:t>
+              <a:t>GAN 시작 후에도 재구성 손실은 계속 하강, D 손실은 0에 붙지 않고 0.4 근처까지만 내려갑니다.</a:t>
             </a:r>
           </a:p>
         </p:txBody>
@@ -4416,7 +4440,7 @@
                 </a:solidFill>
                 <a:latin typeface="Pretendard Black"/>
               </a:rPr>
-              <a:t>§5 검증 1 — 차이가 큰 곳을 짚어서</a:t>
+              <a:t>§5 검증 1: 차이가 큰 곳을 짚어서</a:t>
             </a:r>
           </a:p>
         </p:txBody>
@@ -4657,7 +4681,7 @@
                 </a:solidFill>
                 <a:latin typeface="Pretendard Black"/>
               </a:rPr>
-              <a:t>§5 검증 2·3 — 공극률과 구조 통계 S2</a:t>
+              <a:t>§5 검증 2·3: 공극률과 구조 통계 S2</a:t>
             </a:r>
           </a:p>
         </p:txBody>
@@ -4909,7 +4933,7 @@
                 </a:solidFill>
                 <a:latin typeface="Pretendard SemiBold"/>
               </a:rPr>
-              <a:t>선형 대비 약 37배 — 단 UNet과는 근소</a:t>
+              <a:t>선형 대비 약 37배(단 UNet과는 근소)</a:t>
             </a:r>
           </a:p>
           <a:p>
@@ -4994,7 +5018,7 @@
                 </a:solidFill>
                 <a:latin typeface="Pretendard Black"/>
               </a:rPr>
-              <a:t>§5 검증 4 — 투과율 (LBM, 8개 도메인)</a:t>
+              <a:t>§5 검증 4: 투과율 (LBM, 8개 도메인)</a:t>
             </a:r>
           </a:p>
         </p:txBody>
@@ -5235,7 +5259,7 @@
                 </a:solidFill>
                 <a:latin typeface="Pretendard Black"/>
               </a:rPr>
-              <a:t>평가의 교훈 — 지표의 사다리</a:t>
+              <a:t>평가의 교훈: 지표의 사다리</a:t>
             </a:r>
           </a:p>
         </p:txBody>
@@ -5407,7 +5431,7 @@
                 </a:solidFill>
                 <a:latin typeface="Pretendard SemiBold"/>
               </a:rPr>
-              <a:t>1단 공극률 |Δφ| — 부피 비율. 배치·연결은 못 봄 (GAN 이득: 있음)</a:t>
+              <a:t>1단 공극률 |Δφ|: 부피 비율, 배치·연결은 못 봄 (GAN 이득 있음)</a:t>
             </a:r>
           </a:p>
           <a:p>
@@ -5435,7 +5459,7 @@
                 </a:solidFill>
                 <a:latin typeface="Pretendard SemiBold"/>
               </a:rPr>
-              <a:t>2단 S2 상관 — 구조의 통계. 배치가 다르면 갈림 (GAN 이득: 최근접)</a:t>
+              <a:t>2단 S2 상관: 구조의 통계, 배치가 다르면 갈림 (GAN 최근접)</a:t>
             </a:r>
           </a:p>
           <a:p>
@@ -5463,7 +5487,7 @@
                 </a:solidFill>
                 <a:latin typeface="Pretendard SemiBold"/>
               </a:rPr>
-              <a:t>3단 투과율 — 흐름의 물리. 연결성이 전부 (GAN 이득: 가장 뚜렷, 14.2→6.3%)</a:t>
+              <a:t>3단 투과율: 흐름의 물리, 연결성이 전부 (GAN 가장 뚜렷, 14.2→6.3%)</a:t>
             </a:r>
           </a:p>
           <a:p>
@@ -5491,7 +5515,7 @@
                 </a:solidFill>
                 <a:latin typeface="Pretendard SemiBold"/>
               </a:rPr>
-              <a:t>복원 품질은 숫자 하나로 판단하지 않는다 — 용도가 요구하는 지표까지 올라가 검증</a:t>
+              <a:t>복원 품질은 숫자 하나로 판단하지 않는다. 용도가 요구하는 지표까지 올라가 검증</a:t>
             </a:r>
           </a:p>
         </p:txBody>
@@ -5720,7 +5744,7 @@
                 </a:solidFill>
                 <a:latin typeface="Pretendard SemiBold"/>
               </a:rPr>
-              <a:t>흐림은 픽셀 손실의 수학적 귀결 → 판별자와의 경쟁이 "회색 벌점"을 만든다</a:t>
+              <a:t>흐림은 픽셀 손실의 수학적 귀결이고, 판별자와의 경쟁이 "회색 벌점"을 만든다</a:t>
             </a:r>
           </a:p>
           <a:p>
@@ -5748,7 +5772,7 @@
                 </a:solidFill>
                 <a:latin typeface="Pretendard SemiBold"/>
               </a:rPr>
-              <a:t>실습: train_gan( ) 한 함수, 두 경로 — 처음부터 / W2 체크포인트 이어받기</a:t>
+              <a:t>실습: train_gan( ) 한 함수로 두 경로, 처음부터 또는 W2 체크포인트 이어받기</a:t>
             </a:r>
           </a:p>
           <a:p>
@@ -5776,7 +5800,7 @@
                 </a:solidFill>
                 <a:latin typeface="Pretendard SemiBold"/>
               </a:rPr>
-              <a:t>과제(필수): ① GAN 유무 비교 서술  ② λ sweep — 선명도 ↔ |Δφ| 곡선</a:t>
+              <a:t>과제(필수): ① GAN 유무 비교 서술  ② λ sweep으로 선명도 ↔ |Δφ| 곡선</a:t>
             </a:r>
           </a:p>
           <a:p>
@@ -5804,7 +5828,7 @@
                 </a:solidFill>
                 <a:latin typeface="Pretendard SemiBold"/>
               </a:rPr>
-              <a:t>과제(선택): ③ warmup·spectral norm 안정성 실험  ④ "숫자는 비슷, 구조는 다른" 사례</a:t>
+              <a:t>과제(선택): ③ warmup·spectral norm 안정성 실험  ④ "숫자는 비슷, 구조는 다른" 사례 찾기</a:t>
             </a:r>
           </a:p>
           <a:p>
@@ -5832,7 +5856,7 @@
                 </a:solidFill>
                 <a:latin typeface="Pretendard SemiBold"/>
               </a:rPr>
-              <a:t>다음 주 W4: Transformer · 3D 아키텍처와 정면 비교 — 체크포인트 보존!</a:t>
+              <a:t>다음 주 W4: Transformer · 3D 아키텍처와 정면 비교. 체크포인트 보존!</a:t>
             </a:r>
           </a:p>
         </p:txBody>
@@ -5889,7 +5913,7 @@
                 </a:solidFill>
                 <a:latin typeface="Pretendard Black"/>
               </a:rPr>
-              <a:t>여기까지 왔습니다 — 그리고 하나가 남았습니다</a:t>
+              <a:t>여기까지 왔습니다, 그리고 하나가 남았습니다</a:t>
             </a:r>
           </a:p>
         </p:txBody>
@@ -6128,7 +6152,7 @@
                 </a:solidFill>
                 <a:latin typeface="Pretendard SemiBold"/>
               </a:rPr>
-              <a:t>mini UNet + L1: 0.47%p — 14배 개선</a:t>
+              <a:t>mini UNet + L1: 0.47%p, 14배 개선</a:t>
             </a:r>
           </a:p>
           <a:p>
@@ -6341,7 +6365,7 @@
                 </a:solidFill>
                 <a:latin typeface="Pretendard SemiBold"/>
               </a:rPr>
-              <a:t>왜 회색이 생기고, 왜 문제이며, 어떻게 없애는가 — 오늘의 전부입니다.</a:t>
+              <a:t>왜 회색이 생기고, 왜 문제이며, 어떻게 없애는가. 오늘은 이게 전부입니다.</a:t>
             </a:r>
           </a:p>
         </p:txBody>
@@ -6598,7 +6622,7 @@
                 </a:solidFill>
                 <a:latin typeface="Pretendard SemiBold"/>
               </a:rPr>
-              <a:t>L2 기대손실: ŷ=0.5(회색)가 유일한 최소 — 회색을 보상</a:t>
+              <a:t>L2 기대손실: ŷ=0.5(회색)가 유일한 최소, 회색을 보상</a:t>
             </a:r>
           </a:p>
           <a:p>
@@ -6626,7 +6650,7 @@
                 </a:solidFill>
                 <a:latin typeface="Pretendard SemiBold"/>
               </a:rPr>
-              <a:t>L1 기대손실: 0~1 어디든 0.5로 동일 — 회색을 벌하지 않음</a:t>
+              <a:t>L1 기대손실: 0~1 어디든 0.5로 동일, 회색을 벌하지 않음</a:t>
             </a:r>
           </a:p>
           <a:p>
@@ -6654,7 +6678,7 @@
                 </a:solidFill>
                 <a:latin typeface="Pretendard SemiBold"/>
               </a:rPr>
-              <a:t>결론: 픽셀 단위 손실은 "확신하라"는 압력을 만들지 못한다</a:t>
+              <a:t>결론: 픽셀 단위 손실은 "확신하라"는 압력을 못 만든다</a:t>
             </a:r>
           </a:p>
         </p:txBody>
@@ -7144,7 +7168,7 @@
                 </a:solidFill>
                 <a:latin typeface="Pretendard Black"/>
               </a:rPr>
-              <a:t>실측 — 이진화 전 출력의 회색 번짐</a:t>
+              <a:t>실측: 이진화 전 출력의 회색 번짐</a:t>
             </a:r>
           </a:p>
         </p:txBody>
@@ -7328,7 +7352,7 @@
                 </a:solidFill>
                 <a:latin typeface="Pretendard SemiBold"/>
               </a:rPr>
-              <a:t>k=5 조건의 mini 모델. 정답은 0↔1 계단, L1 모델은 완만한 경사(회색 16%, GAN 8%).</a:t>
+              <a:t>k=5 조건의 mini 모델. 정답은 0↔1 계단, L1 모델은 완만한 경사(회색 14%, GAN 5%).</a:t>
             </a:r>
           </a:p>
         </p:txBody>
@@ -7385,7 +7409,7 @@
                 </a:solidFill>
                 <a:latin typeface="Pretendard Black"/>
               </a:rPr>
-              <a:t>§2 GAN — 그림을 심사하는 두 번째 신경망</a:t>
+              <a:t>§2 GAN, 그림을 심사하는 두 번째 신경망</a:t>
             </a:r>
           </a:p>
         </p:txBody>
@@ -7596,7 +7620,7 @@
                 </a:solidFill>
                 <a:latin typeface="Pretendard SemiBold"/>
               </a:rPr>
-              <a:t>위조범 — 그럴듯하게 만든다</a:t>
+              <a:t>위조범: 그럴듯하게 만든다</a:t>
             </a:r>
           </a:p>
           <a:p>
@@ -7742,7 +7766,7 @@
                 </a:solidFill>
                 <a:latin typeface="Pretendard SemiBold"/>
               </a:rPr>
-              <a:t>감별사 — 진짜인지 심사한다</a:t>
+              <a:t>감별사: 진짜인지 심사한다</a:t>
             </a:r>
           </a:p>
           <a:p>
@@ -8146,7 +8170,7 @@
                 </a:solidFill>
                 <a:latin typeface="Pretendard SemiBold"/>
               </a:rPr>
-              <a:t>G 손실 = −D(G(x)) — 점수를 올리는 방향</a:t>
+              <a:t>G 손실 = −D(G(x)), 점수를 올리는 방향</a:t>
             </a:r>
           </a:p>
           <a:p>
@@ -8676,7 +8700,7 @@
                 </a:solidFill>
                 <a:latin typeface="Pretendard Black"/>
               </a:rPr>
-              <a:t>실측 — 학습된 판별자가 보는 것</a:t>
+              <a:t>실측: 학습된 판별자가 보는 것</a:t>
             </a:r>
           </a:p>
         </p:txBody>
@@ -8860,7 +8884,7 @@
                 </a:solidFill>
                 <a:latin typeface="Pretendard SemiBold"/>
               </a:rPr>
-              <a:t>진짜 +2.19 · 흐린 L1 출력 −4.59 (강하게 들킴) · GAN 출력 +0.46 (거의 속음)</a:t>
+              <a:t>진짜 +0.30 · 흐린 L1 출력 −5.09 (강하게 거부) · GAN 출력 −0.59 (중립 근처)</a:t>
             </a:r>
           </a:p>
         </p:txBody>

--- a/web/downloads/shared/w3/W3.pptx
+++ b/web/downloads/shared/w3/W3.pptx
@@ -5913,7 +5913,7 @@
                 </a:solidFill>
                 <a:latin typeface="Pretendard Black"/>
               </a:rPr>
-              <a:t>여기까지 왔습니다, 그리고 하나가 남았습니다</a:t>
+              <a:t>여기까지 왔고, 하나가 남았다</a:t>
             </a:r>
           </a:p>
         </p:txBody>
@@ -6365,7 +6365,7 @@
                 </a:solidFill>
                 <a:latin typeface="Pretendard SemiBold"/>
               </a:rPr>
-              <a:t>왜 회색이 생기고, 왜 문제이며, 어떻게 없애는가. 오늘은 이게 전부입니다.</a:t>
+              <a:t>왜 회색이 생기고, 왜 문제이며, 어떻게 없애는가. 오늘은 이게 전부다.</a:t>
             </a:r>
           </a:p>
         </p:txBody>
@@ -6594,7 +6594,7 @@
                 </a:solidFill>
                 <a:latin typeface="Pretendard SemiBold"/>
               </a:rPr>
-              <a:t>정답이 절반 확률로 0(고체) 또는 1(공극)인 픽셀 하나를 생각합니다</a:t>
+              <a:t>정답이 절반 확률로 0(고체) 또는 1(공극)인 픽셀 하나를 생각한다</a:t>
             </a:r>
           </a:p>
           <a:p>
@@ -6974,7 +6974,7 @@
         <p:spPr>
           <a:xfrm>
             <a:off x="548640" y="1463040"/>
-            <a:ext cx="7863840" cy="2326194"/>
+            <a:ext cx="7863840" cy="2264816"/>
           </a:xfrm>
           <a:prstGeom prst="rect">
             <a:avLst/>

--- a/web/downloads/shared/w3/W3.pptx
+++ b/web/downloads/shared/w3/W3.pptx
@@ -3257,7 +3257,7 @@
                 </a:solidFill>
                 <a:latin typeface="Pretendard SemiBold"/>
               </a:rPr>
-              <a:t>두 신경망을 경쟁시켜 복원의 흐림을 걷어냅니다. 원리·수식부터 투과율 검증까지</a:t>
+              <a:t>두 신경망의 경쟁으로 복원의 흐림을 제거한다. 원리·수식부터 투과율 검증까지</a:t>
             </a:r>
           </a:p>
         </p:txBody>
@@ -3353,7 +3353,7 @@
                 </a:solidFill>
                 <a:latin typeface="Pretendard Black"/>
               </a:rPr>
-              <a:t>§3 우리 문제에 맞추는 세 장치</a:t>
+              <a:t>§3 pix2pix 구성 요소</a:t>
             </a:r>
           </a:p>
         </p:txBody>
@@ -3525,7 +3525,7 @@
                 </a:solidFill>
                 <a:latin typeface="Pretendard SemiBold"/>
               </a:rPr>
-              <a:t>① 조건부: 판별자도 이웃(문제지)을 본다</a:t>
+              <a:t>① 조건부: 판별자 입력에 이웃 슬라이스 포함</a:t>
             </a:r>
           </a:p>
           <a:p>
@@ -3553,7 +3553,7 @@
                 </a:solidFill>
                 <a:latin typeface="Pretendard SemiBold"/>
               </a:rPr>
-              <a:t>② PatchGAN: 조각마다 점수 (15×15 점수 map)</a:t>
+              <a:t>② PatchGAN: patch마다 점수 (15×15 점수 map)</a:t>
             </a:r>
           </a:p>
           <a:p>
@@ -3701,7 +3701,7 @@
                 </a:solidFill>
                 <a:latin typeface="Pretendard Black"/>
               </a:rPr>
-              <a:t>§4 줄다리기를 무너지지 않게</a:t>
+              <a:t>§4 학습 안정화</a:t>
             </a:r>
           </a:p>
         </p:txBody>
@@ -4199,7 +4199,7 @@
                 </a:solidFill>
                 <a:latin typeface="Pretendard Black"/>
               </a:rPr>
-              <a:t>실측: 균형 잡힌 줄다리기의 곡선</a:t>
+              <a:t>학습 곡선 해석</a:t>
             </a:r>
           </a:p>
         </p:txBody>
@@ -4383,7 +4383,7 @@
                 </a:solidFill>
                 <a:latin typeface="Pretendard SemiBold"/>
               </a:rPr>
-              <a:t>GAN 시작 후에도 재구성 손실은 계속 하강, D 손실은 0에 붙지 않고 0.4 근처까지만 내려갑니다.</a:t>
+              <a:t>GAN 시작 후에도 재구성 손실은 계속 하강, D 손실은 0에 붙지 않고 0.4 근처까지만 내려간다.</a:t>
             </a:r>
           </a:p>
         </p:txBody>
@@ -4440,7 +4440,7 @@
                 </a:solidFill>
                 <a:latin typeface="Pretendard Black"/>
               </a:rPr>
-              <a:t>§5 검증 1: 차이가 큰 곳을 짚어서</a:t>
+              <a:t>§5 검증 1: 복원 결과와 차이 영역</a:t>
             </a:r>
           </a:p>
         </p:txBody>
@@ -4681,7 +4681,7 @@
                 </a:solidFill>
                 <a:latin typeface="Pretendard Black"/>
               </a:rPr>
-              <a:t>§5 검증 2·3: 공극률과 구조 통계 S2</a:t>
+              <a:t>§5 검증 2·3: 공극률과 S2 두점 상관</a:t>
             </a:r>
           </a:p>
         </p:txBody>
@@ -5259,7 +5259,7 @@
                 </a:solidFill>
                 <a:latin typeface="Pretendard Black"/>
               </a:rPr>
-              <a:t>평가의 교훈: 지표의 사다리</a:t>
+              <a:t>평가 지표별 민감도</a:t>
             </a:r>
           </a:p>
         </p:txBody>
@@ -5431,7 +5431,7 @@
                 </a:solidFill>
                 <a:latin typeface="Pretendard SemiBold"/>
               </a:rPr>
-              <a:t>1단 공극률 |Δφ|: 부피 비율, 배치·연결은 못 봄 (GAN 이득 있음)</a:t>
+              <a:t>1단 공극률 |Δφ|: 부피 비율, 배치·연결에는 둔감 (GAN 이득 있음)</a:t>
             </a:r>
           </a:p>
           <a:p>
@@ -5487,7 +5487,7 @@
                 </a:solidFill>
                 <a:latin typeface="Pretendard SemiBold"/>
               </a:rPr>
-              <a:t>3단 투과율: 흐름의 물리, 연결성이 전부 (GAN 가장 뚜렷, 14.2→6.3%)</a:t>
+              <a:t>3단 투과율: 흐름의 물리, 연결성에 지배됨 (GAN 가장 뚜렷, 14.2→6.3%)</a:t>
             </a:r>
           </a:p>
           <a:p>
@@ -5515,7 +5515,7 @@
                 </a:solidFill>
                 <a:latin typeface="Pretendard SemiBold"/>
               </a:rPr>
-              <a:t>복원 품질은 숫자 하나로 판단하지 않는다. 용도가 요구하는 지표까지 올라가 검증</a:t>
+              <a:t>복원 품질은 단일 지표로 판단하지 않는다. 용도가 요구하는 지표까지 올라가 검증한다</a:t>
             </a:r>
           </a:p>
         </p:txBody>
@@ -5572,7 +5572,7 @@
                 </a:solidFill>
                 <a:latin typeface="Pretendard Black"/>
               </a:rPr>
-              <a:t>정리 · 실습 · 다음 주</a:t>
+              <a:t>핵심 요약</a:t>
             </a:r>
           </a:p>
         </p:txBody>
@@ -5744,7 +5744,7 @@
                 </a:solidFill>
                 <a:latin typeface="Pretendard SemiBold"/>
               </a:rPr>
-              <a:t>흐림은 픽셀 손실의 수학적 귀결이고, 판별자와의 경쟁이 "회색 벌점"을 만든다</a:t>
+              <a:t>흐림은 픽셀 손실의 수학적 귀결이고, 판별자와의 경쟁이 회색에 벌점을 부여한다</a:t>
             </a:r>
           </a:p>
           <a:p>
@@ -5828,7 +5828,7 @@
                 </a:solidFill>
                 <a:latin typeface="Pretendard SemiBold"/>
               </a:rPr>
-              <a:t>과제(선택): ③ warmup·spectral norm 안정성 실험  ④ "숫자는 비슷, 구조는 다른" 사례 찾기</a:t>
+              <a:t>과제(선택): ③ warmup·spectral norm 안정성 실험  ④ 숫자는 비슷하나 구조는 다른 사례 찾기</a:t>
             </a:r>
           </a:p>
           <a:p>
@@ -5856,7 +5856,7 @@
                 </a:solidFill>
                 <a:latin typeface="Pretendard SemiBold"/>
               </a:rPr>
-              <a:t>다음 주 W4: Transformer · 3D 아키텍처와 정면 비교. 체크포인트 보존!</a:t>
+              <a:t>다음 주 W4: Transformer · 3D 아키텍처와 비교. 체크포인트 보존</a:t>
             </a:r>
           </a:p>
         </p:txBody>
@@ -5913,7 +5913,7 @@
                 </a:solidFill>
                 <a:latin typeface="Pretendard Black"/>
               </a:rPr>
-              <a:t>여기까지 왔고, 하나가 남았다</a:t>
+              <a:t>지난 강의 요약과 남은 문제</a:t>
             </a:r>
           </a:p>
         </p:txBody>
@@ -6326,7 +6326,7 @@
                 </a:solidFill>
                 <a:latin typeface="Pretendard SemiBold"/>
               </a:rPr>
-              <a:t>진짜 암석에는 없는 값</a:t>
+              <a:t>실제 암석에는 없는 값</a:t>
             </a:r>
           </a:p>
         </p:txBody>
@@ -6365,7 +6365,7 @@
                 </a:solidFill>
                 <a:latin typeface="Pretendard SemiBold"/>
               </a:rPr>
-              <a:t>왜 회색이 생기고, 왜 문제이며, 어떻게 없애는가. 오늘은 이게 전부다.</a:t>
+              <a:t>회색이 생기는 원인, 그로 인한 문제, 제거 방법을 다룬다.</a:t>
             </a:r>
           </a:p>
         </p:txBody>
@@ -6422,7 +6422,7 @@
                 </a:solidFill>
                 <a:latin typeface="Pretendard Black"/>
               </a:rPr>
-              <a:t>§1 픽셀 하나로 계산하는 흐림의 근원</a:t>
+              <a:t>§1 픽셀 단위로 본 흐림의 원인</a:t>
             </a:r>
           </a:p>
         </p:txBody>
@@ -6594,7 +6594,7 @@
                 </a:solidFill>
                 <a:latin typeface="Pretendard SemiBold"/>
               </a:rPr>
-              <a:t>정답이 절반 확률로 0(고체) 또는 1(공극)인 픽셀 하나를 생각한다</a:t>
+              <a:t>정답이 절반 확률로 0(고체) 또는 1(공극)인 픽셀 하나를 상정한다</a:t>
             </a:r>
           </a:p>
           <a:p>
@@ -6678,7 +6678,7 @@
                 </a:solidFill>
                 <a:latin typeface="Pretendard SemiBold"/>
               </a:rPr>
-              <a:t>결론: 픽셀 단위 손실은 "확신하라"는 압력을 못 만든다</a:t>
+              <a:t>픽셀 단위 손실은 확신을 요구하는 압력을 만들지 못한다</a:t>
             </a:r>
           </a:p>
         </p:txBody>
@@ -6774,7 +6774,7 @@
                 </a:solidFill>
                 <a:latin typeface="Consolas"/>
               </a:rPr>
-              <a:t>E[|y-yh|]   = 0.5  (0&lt;=yh&lt;=1 어디서나 동일)</a:t>
+              <a:t>E[|y-yh|]   = 0.5  (0&lt;=yh&lt;=1 전 구간 동일)</a:t>
             </a:r>
           </a:p>
         </p:txBody>
@@ -6831,7 +6831,7 @@
                 </a:solidFill>
                 <a:latin typeface="Pretendard Black"/>
               </a:rPr>
-              <a:t>정답이 여럿이면 손실은 "평균"을 고릅니다</a:t>
+              <a:t>정답이 여럿일 때 L1의 선택: 평균</a:t>
             </a:r>
           </a:p>
         </p:txBody>
@@ -7083,7 +7083,7 @@
                 </a:solidFill>
                 <a:latin typeface="Pretendard SemiBold"/>
               </a:rPr>
-              <a:t>진짜 암석에 없는 이미지</a:t>
+              <a:t>실제 암석에 없는 이미지</a:t>
             </a:r>
           </a:p>
           <a:p>
@@ -7111,7 +7111,7 @@
                 </a:solidFill>
                 <a:latin typeface="Pretendard SemiBold"/>
               </a:rPr>
-              <a:t>필요한 압력: "하나를 확신 있게"</a:t>
+              <a:t>필요한 압력: 하나를 확신 있게 출력</a:t>
             </a:r>
           </a:p>
         </p:txBody>
@@ -7168,7 +7168,7 @@
                 </a:solidFill>
                 <a:latin typeface="Pretendard Black"/>
               </a:rPr>
-              <a:t>실측: 이진화 전 출력의 회색 번짐</a:t>
+              <a:t>W2 모델 출력의 흐림 확인</a:t>
             </a:r>
           </a:p>
         </p:txBody>
@@ -7409,7 +7409,7 @@
                 </a:solidFill>
                 <a:latin typeface="Pretendard Black"/>
               </a:rPr>
-              <a:t>§2 GAN, 그림을 심사하는 두 번째 신경망</a:t>
+              <a:t>§2 GAN · 출력을 판정하는 두 번째 신경망</a:t>
             </a:r>
           </a:p>
         </p:txBody>
@@ -7620,7 +7620,7 @@
                 </a:solidFill>
                 <a:latin typeface="Pretendard SemiBold"/>
               </a:rPr>
-              <a:t>위조범: 그럴듯하게 만든다</a:t>
+              <a:t>실제와 유사한 슬라이스를 생성</a:t>
             </a:r>
           </a:p>
           <a:p>
@@ -7766,7 +7766,7 @@
                 </a:solidFill>
                 <a:latin typeface="Pretendard SemiBold"/>
               </a:rPr>
-              <a:t>감별사: 진짜인지 심사한다</a:t>
+              <a:t>입력이 실제 단면인지 판정</a:t>
             </a:r>
           </a:p>
           <a:p>
@@ -7861,7 +7861,7 @@
                 </a:solidFill>
                 <a:latin typeface="Pretendard SemiBold"/>
               </a:rPr>
-              <a:t>진짜 단면에 회색 경계는 없다 → 회색을 내면 들킨다 → 생성자는 확신 있는 구조를 배운다</a:t>
+              <a:t>실제 단면에 회색 경계는 없다 → 회색을 내면 판별자에 걸린다 → 생성자는 확신 있는 구조를 학습한다</a:t>
             </a:r>
           </a:p>
         </p:txBody>
@@ -7918,7 +7918,7 @@
                 </a:solidFill>
                 <a:latin typeface="Pretendard Black"/>
               </a:rPr>
-              <a:t>min-max 게임과 hinge 손실</a:t>
+              <a:t>목적 함수: min–max</a:t>
             </a:r>
           </a:p>
         </p:txBody>
@@ -8255,7 +8255,7 @@
                 </a:solidFill>
                 <a:latin typeface="Pretendard Black"/>
               </a:rPr>
-              <a:t>한 배치, 두 번의 갱신</a:t>
+              <a:t>교대 갱신: 한 배치에 D·G 순서로</a:t>
             </a:r>
           </a:p>
         </p:txBody>
@@ -8643,7 +8643,7 @@
                 </a:solidFill>
                 <a:latin typeface="Pretendard SemiBold"/>
               </a:rPr>
-              <a:t>항상 상대의 최신판과 대결</a:t>
+              <a:t>항상 상대의 최신 가중치와 대결</a:t>
             </a:r>
           </a:p>
         </p:txBody>
@@ -8700,7 +8700,7 @@
                 </a:solidFill>
                 <a:latin typeface="Pretendard Black"/>
               </a:rPr>
-              <a:t>실측: 학습된 판별자가 보는 것</a:t>
+              <a:t>학습된 판별자가 반응하는 특징</a:t>
             </a:r>
           </a:p>
         </p:txBody>
@@ -8884,7 +8884,7 @@
                 </a:solidFill>
                 <a:latin typeface="Pretendard SemiBold"/>
               </a:rPr>
-              <a:t>진짜 +0.30 · 흐린 L1 출력 −5.09 (강하게 거부) · GAN 출력 −0.59 (중립 근처)</a:t>
+              <a:t>실제 +0.30 · 흐린 L1 출력 −5.09 (강하게 거부) · GAN 출력 −0.59 (중립 근처)</a:t>
             </a:r>
           </a:p>
         </p:txBody>
